--- a/slides/3-7_naloxone_flumazenil/3-7_naloxone_flumazenil.pptx
+++ b/slides/3-7_naloxone_flumazenil/3-7_naloxone_flumazenil.pptx
@@ -2151,7 +2151,7 @@
           </a:xfrm>
           <a:prstGeom prst="roundRect">
             <a:avLst>
-              <a:gd name="adj" fmla="val 15625"/>
+              <a:gd name="adj" fmla="val 7813"/>
             </a:avLst>
           </a:prstGeom>
           <a:solidFill>
@@ -2160,14 +2160,14 @@
           <a:ln/>
         </p:spPr>
         <p:txBody>
-          <a:bodyPr wrap="square" lIns="0" tIns="0" rIns="0" bIns="0" rtlCol="0" anchor="ctr"/>
+          <a:bodyPr wrap="none" lIns="0" tIns="0" rIns="0" bIns="0" rtlCol="0" anchor="ctr"/>
           <a:lstStyle/>
           <a:p>
             <a:pPr algn="ctr" indent="0" marL="0">
               <a:buNone/>
             </a:pPr>
             <a:r>
-              <a:rPr lang="ja-JP" altLang="en-US" sz="1100" b="1" dirty="0">
+              <a:rPr lang="ja-JP" altLang="en-US" sz="1050" b="1" dirty="0">
                 <a:solidFill>
                   <a:srgbClr val="FFFFFF"/>
                 </a:solidFill>
@@ -2177,7 +2177,7 @@
               </a:rPr>
               <a:t>考え方</a:t>
             </a:r>
-            <a:endParaRPr lang="ja-JP" sz="1100" dirty="0"/>
+            <a:endParaRPr lang="ja-JP" sz="1050" dirty="0"/>
           </a:p>
         </p:txBody>
       </p:sp>
@@ -2194,7 +2194,7 @@
           </a:xfrm>
           <a:prstGeom prst="roundRect">
             <a:avLst>
-              <a:gd name="adj" fmla="val 15625"/>
+              <a:gd name="adj" fmla="val 7813"/>
             </a:avLst>
           </a:prstGeom>
           <a:solidFill>
@@ -2203,14 +2203,14 @@
           <a:ln/>
         </p:spPr>
         <p:txBody>
-          <a:bodyPr wrap="square" lIns="0" tIns="0" rIns="0" bIns="0" rtlCol="0" anchor="ctr"/>
+          <a:bodyPr wrap="none" lIns="0" tIns="0" rIns="0" bIns="0" rtlCol="0" anchor="ctr"/>
           <a:lstStyle/>
           <a:p>
             <a:pPr algn="ctr" indent="0" marL="0">
               <a:buNone/>
             </a:pPr>
             <a:r>
-              <a:rPr lang="ja-JP" altLang="en-US" sz="1100" dirty="0">
+              <a:rPr lang="ja-JP" altLang="en-US" sz="1050" dirty="0">
                 <a:solidFill>
                   <a:srgbClr val="404040"/>
                 </a:solidFill>
@@ -2220,14 +2220,14 @@
               </a:rPr>
               <a:t>ナロ</a:t>
             </a:r>
-            <a:endParaRPr lang="ja-JP" sz="1100" dirty="0"/>
+            <a:endParaRPr lang="ja-JP" sz="1050" dirty="0"/>
           </a:p>
           <a:p>
             <a:pPr algn="ctr" indent="0" marL="0">
               <a:buNone/>
             </a:pPr>
             <a:r>
-              <a:rPr lang="ja-JP" altLang="en-US" sz="1100" dirty="0">
+              <a:rPr lang="ja-JP" altLang="en-US" sz="1050" dirty="0">
                 <a:solidFill>
                   <a:srgbClr val="404040"/>
                 </a:solidFill>
@@ -2237,7 +2237,7 @@
               </a:rPr>
               <a:t>キソン</a:t>
             </a:r>
-            <a:endParaRPr lang="ja-JP" sz="1100" dirty="0"/>
+            <a:endParaRPr lang="ja-JP" sz="1050" dirty="0"/>
           </a:p>
         </p:txBody>
       </p:sp>
@@ -2254,7 +2254,7 @@
           </a:xfrm>
           <a:prstGeom prst="roundRect">
             <a:avLst>
-              <a:gd name="adj" fmla="val 15625"/>
+              <a:gd name="adj" fmla="val 7813"/>
             </a:avLst>
           </a:prstGeom>
           <a:solidFill>
@@ -2263,14 +2263,14 @@
           <a:ln/>
         </p:spPr>
         <p:txBody>
-          <a:bodyPr wrap="square" lIns="0" tIns="0" rIns="0" bIns="0" rtlCol="0" anchor="ctr"/>
+          <a:bodyPr wrap="none" lIns="0" tIns="0" rIns="0" bIns="0" rtlCol="0" anchor="ctr"/>
           <a:lstStyle/>
           <a:p>
             <a:pPr algn="ctr" indent="0" marL="0">
               <a:buNone/>
             </a:pPr>
             <a:r>
-              <a:rPr lang="ja-JP" altLang="en-US" sz="1100" dirty="0">
+              <a:rPr lang="ja-JP" altLang="en-US" sz="1050" dirty="0">
                 <a:solidFill>
                   <a:srgbClr val="404040"/>
                 </a:solidFill>
@@ -2280,14 +2280,14 @@
               </a:rPr>
               <a:t>フルマ</a:t>
             </a:r>
-            <a:endParaRPr lang="ja-JP" sz="1100" dirty="0"/>
+            <a:endParaRPr lang="ja-JP" sz="1050" dirty="0"/>
           </a:p>
           <a:p>
             <a:pPr algn="ctr" indent="0" marL="0">
               <a:buNone/>
             </a:pPr>
             <a:r>
-              <a:rPr lang="ja-JP" altLang="en-US" sz="1100" dirty="0">
+              <a:rPr lang="ja-JP" altLang="en-US" sz="1050" dirty="0">
                 <a:solidFill>
                   <a:srgbClr val="404040"/>
                 </a:solidFill>
@@ -2297,7 +2297,7 @@
               </a:rPr>
               <a:t>ゼニル</a:t>
             </a:r>
-            <a:endParaRPr lang="ja-JP" sz="1100" dirty="0"/>
+            <a:endParaRPr lang="ja-JP" sz="1050" dirty="0"/>
           </a:p>
         </p:txBody>
       </p:sp>
@@ -2314,7 +2314,7 @@
           </a:xfrm>
           <a:prstGeom prst="roundRect">
             <a:avLst>
-              <a:gd name="adj" fmla="val 15625"/>
+              <a:gd name="adj" fmla="val 7813"/>
             </a:avLst>
           </a:prstGeom>
           <a:solidFill>
@@ -2323,14 +2323,14 @@
           <a:ln/>
         </p:spPr>
         <p:txBody>
-          <a:bodyPr wrap="square" lIns="0" tIns="0" rIns="0" bIns="0" rtlCol="0" anchor="ctr"/>
+          <a:bodyPr wrap="none" lIns="0" tIns="0" rIns="0" bIns="0" rtlCol="0" anchor="ctr"/>
           <a:lstStyle/>
           <a:p>
             <a:pPr algn="ctr" indent="0" marL="0">
               <a:buNone/>
             </a:pPr>
             <a:r>
-              <a:rPr lang="ja-JP" altLang="en-US" sz="1100" dirty="0">
+              <a:rPr lang="ja-JP" altLang="en-US" sz="1050" dirty="0">
                 <a:solidFill>
                   <a:srgbClr val="404040"/>
                 </a:solidFill>
@@ -2340,7 +2340,7 @@
               </a:rPr>
               <a:t>落とし穴</a:t>
             </a:r>
-            <a:endParaRPr lang="ja-JP" sz="1100" dirty="0"/>
+            <a:endParaRPr lang="ja-JP" sz="1050" dirty="0"/>
           </a:p>
         </p:txBody>
       </p:sp>
@@ -2357,7 +2357,7 @@
           </a:xfrm>
           <a:prstGeom prst="roundRect">
             <a:avLst>
-              <a:gd name="adj" fmla="val 15625"/>
+              <a:gd name="adj" fmla="val 7813"/>
             </a:avLst>
           </a:prstGeom>
           <a:solidFill>
@@ -2366,14 +2366,14 @@
           <a:ln/>
         </p:spPr>
         <p:txBody>
-          <a:bodyPr wrap="square" lIns="0" tIns="0" rIns="0" bIns="0" rtlCol="0" anchor="ctr"/>
+          <a:bodyPr wrap="none" lIns="0" tIns="0" rIns="0" bIns="0" rtlCol="0" anchor="ctr"/>
           <a:lstStyle/>
           <a:p>
             <a:pPr algn="ctr" indent="0" marL="0">
               <a:buNone/>
             </a:pPr>
             <a:r>
-              <a:rPr lang="ja-JP" altLang="en-US" sz="1100" dirty="0">
+              <a:rPr lang="ja-JP" altLang="en-US" sz="1050" dirty="0">
                 <a:solidFill>
                   <a:srgbClr val="404040"/>
                 </a:solidFill>
@@ -2383,7 +2383,7 @@
               </a:rPr>
               <a:t>手順</a:t>
             </a:r>
-            <a:endParaRPr lang="ja-JP" sz="1100" dirty="0"/>
+            <a:endParaRPr lang="ja-JP" sz="1050" dirty="0"/>
           </a:p>
         </p:txBody>
       </p:sp>
@@ -2491,7 +2491,7 @@
         <p:spPr>
           <a:xfrm>
             <a:off x="502920" y="2176272"/>
-            <a:ext cx="2212848" cy="1371600"/>
+            <a:ext cx="2103120" cy="1371600"/>
           </a:xfrm>
           <a:prstGeom prst="roundRect">
             <a:avLst>
@@ -2508,7 +2508,7 @@
           </a:ln>
         </p:spPr>
         <p:txBody>
-          <a:bodyPr wrap="square" lIns="73152" tIns="73152" rIns="73152" bIns="73152" rtlCol="0" anchor="ctr"/>
+          <a:bodyPr wrap="square" lIns="54864" tIns="54864" rIns="54864" bIns="54864" rtlCol="0" anchor="ctr"/>
           <a:lstStyle/>
           <a:p>
             <a:pPr algn="ctr" indent="0" marL="0">
@@ -2554,14 +2554,14 @@
         </p:nvSpPr>
         <p:spPr>
           <a:xfrm>
-            <a:off x="2898648" y="2862072"/>
-            <a:ext cx="411480" cy="0"/>
+            <a:off x="2825496" y="2862072"/>
+            <a:ext cx="484632" cy="0"/>
           </a:xfrm>
           <a:prstGeom prst="line">
             <a:avLst/>
           </a:prstGeom>
           <a:noFill/>
-          <a:ln w="38100">
+          <a:ln w="57150">
             <a:solidFill>
               <a:srgbClr val="404040"/>
             </a:solidFill>
@@ -2578,8 +2578,8 @@
         </p:nvSpPr>
         <p:spPr>
           <a:xfrm>
-            <a:off x="3493008" y="2176272"/>
-            <a:ext cx="2212848" cy="1371600"/>
+            <a:off x="3529584" y="2176272"/>
+            <a:ext cx="2103120" cy="1371600"/>
           </a:xfrm>
           <a:prstGeom prst="roundRect">
             <a:avLst>
@@ -2596,7 +2596,7 @@
           </a:ln>
         </p:spPr>
         <p:txBody>
-          <a:bodyPr wrap="square" lIns="73152" tIns="73152" rIns="73152" bIns="73152" rtlCol="0" anchor="ctr"/>
+          <a:bodyPr wrap="square" lIns="54864" tIns="54864" rIns="54864" bIns="54864" rtlCol="0" anchor="ctr"/>
           <a:lstStyle/>
           <a:p>
             <a:pPr algn="ctr" indent="0" marL="0">
@@ -2642,14 +2642,14 @@
         </p:nvSpPr>
         <p:spPr>
           <a:xfrm>
-            <a:off x="5888736" y="2862072"/>
-            <a:ext cx="411480" cy="0"/>
+            <a:off x="5852160" y="2862072"/>
+            <a:ext cx="484632" cy="0"/>
           </a:xfrm>
           <a:prstGeom prst="line">
             <a:avLst/>
           </a:prstGeom>
           <a:noFill/>
-          <a:ln w="38100">
+          <a:ln w="57150">
             <a:solidFill>
               <a:srgbClr val="404040"/>
             </a:solidFill>
@@ -2666,8 +2666,8 @@
         </p:nvSpPr>
         <p:spPr>
           <a:xfrm>
-            <a:off x="6483096" y="2176272"/>
-            <a:ext cx="2212848" cy="1371600"/>
+            <a:off x="6556248" y="2176272"/>
+            <a:ext cx="2103120" cy="1371600"/>
           </a:xfrm>
           <a:prstGeom prst="roundRect">
             <a:avLst>
@@ -2684,7 +2684,7 @@
           </a:ln>
         </p:spPr>
         <p:txBody>
-          <a:bodyPr wrap="square" lIns="73152" tIns="73152" rIns="73152" bIns="73152" rtlCol="0" anchor="ctr"/>
+          <a:bodyPr wrap="square" lIns="54864" tIns="54864" rIns="54864" bIns="54864" rtlCol="0" anchor="ctr"/>
           <a:lstStyle/>
           <a:p>
             <a:pPr algn="ctr" indent="0" marL="0">
@@ -2731,13 +2731,13 @@
         <p:spPr>
           <a:xfrm>
             <a:off x="8878824" y="2862072"/>
-            <a:ext cx="411480" cy="0"/>
+            <a:ext cx="484632" cy="0"/>
           </a:xfrm>
           <a:prstGeom prst="line">
             <a:avLst/>
           </a:prstGeom>
           <a:noFill/>
-          <a:ln w="38100">
+          <a:ln w="57150">
             <a:solidFill>
               <a:srgbClr val="404040"/>
             </a:solidFill>
@@ -2754,8 +2754,8 @@
         </p:nvSpPr>
         <p:spPr>
           <a:xfrm>
-            <a:off x="9473184" y="2176272"/>
-            <a:ext cx="2212848" cy="1371600"/>
+            <a:off x="9582912" y="2176272"/>
+            <a:ext cx="2103120" cy="1371600"/>
           </a:xfrm>
           <a:prstGeom prst="roundRect">
             <a:avLst>
@@ -2772,7 +2772,7 @@
           </a:ln>
         </p:spPr>
         <p:txBody>
-          <a:bodyPr wrap="square" lIns="73152" tIns="73152" rIns="73152" bIns="73152" rtlCol="0" anchor="ctr"/>
+          <a:bodyPr wrap="square" lIns="54864" tIns="54864" rIns="54864" bIns="54864" rtlCol="0" anchor="ctr"/>
           <a:lstStyle/>
           <a:p>
             <a:pPr algn="ctr" indent="0" marL="0">
@@ -2977,7 +2977,7 @@
           </a:xfrm>
           <a:prstGeom prst="roundRect">
             <a:avLst>
-              <a:gd name="adj" fmla="val 15625"/>
+              <a:gd name="adj" fmla="val 7813"/>
             </a:avLst>
           </a:prstGeom>
           <a:solidFill>
@@ -2986,14 +2986,14 @@
           <a:ln/>
         </p:spPr>
         <p:txBody>
-          <a:bodyPr wrap="square" lIns="0" tIns="0" rIns="0" bIns="0" rtlCol="0" anchor="ctr"/>
+          <a:bodyPr wrap="none" lIns="0" tIns="0" rIns="0" bIns="0" rtlCol="0" anchor="ctr"/>
           <a:lstStyle/>
           <a:p>
             <a:pPr algn="ctr" indent="0" marL="0">
               <a:buNone/>
             </a:pPr>
             <a:r>
-              <a:rPr lang="ja-JP" altLang="en-US" sz="1100" dirty="0">
+              <a:rPr lang="ja-JP" altLang="en-US" sz="1050" dirty="0">
                 <a:solidFill>
                   <a:srgbClr val="404040"/>
                 </a:solidFill>
@@ -3003,7 +3003,7 @@
               </a:rPr>
               <a:t>考え方</a:t>
             </a:r>
-            <a:endParaRPr lang="ja-JP" sz="1100" dirty="0"/>
+            <a:endParaRPr lang="ja-JP" sz="1050" dirty="0"/>
           </a:p>
         </p:txBody>
       </p:sp>
@@ -3020,7 +3020,7 @@
           </a:xfrm>
           <a:prstGeom prst="roundRect">
             <a:avLst>
-              <a:gd name="adj" fmla="val 15625"/>
+              <a:gd name="adj" fmla="val 7813"/>
             </a:avLst>
           </a:prstGeom>
           <a:solidFill>
@@ -3029,14 +3029,14 @@
           <a:ln/>
         </p:spPr>
         <p:txBody>
-          <a:bodyPr wrap="square" lIns="0" tIns="0" rIns="0" bIns="0" rtlCol="0" anchor="ctr"/>
+          <a:bodyPr wrap="none" lIns="0" tIns="0" rIns="0" bIns="0" rtlCol="0" anchor="ctr"/>
           <a:lstStyle/>
           <a:p>
             <a:pPr algn="ctr" indent="0" marL="0">
               <a:buNone/>
             </a:pPr>
             <a:r>
-              <a:rPr lang="ja-JP" altLang="en-US" sz="1100" b="1" dirty="0">
+              <a:rPr lang="ja-JP" altLang="en-US" sz="1050" b="1" dirty="0">
                 <a:solidFill>
                   <a:srgbClr val="FFFFFF"/>
                 </a:solidFill>
@@ -3046,14 +3046,14 @@
               </a:rPr>
               <a:t>ナロ</a:t>
             </a:r>
-            <a:endParaRPr lang="ja-JP" sz="1100" dirty="0"/>
+            <a:endParaRPr lang="ja-JP" sz="1050" dirty="0"/>
           </a:p>
           <a:p>
             <a:pPr algn="ctr" indent="0" marL="0">
               <a:buNone/>
             </a:pPr>
             <a:r>
-              <a:rPr lang="ja-JP" altLang="en-US" sz="1100" b="1" dirty="0">
+              <a:rPr lang="ja-JP" altLang="en-US" sz="1050" b="1" dirty="0">
                 <a:solidFill>
                   <a:srgbClr val="FFFFFF"/>
                 </a:solidFill>
@@ -3063,7 +3063,7 @@
               </a:rPr>
               <a:t>キソン</a:t>
             </a:r>
-            <a:endParaRPr lang="ja-JP" sz="1100" dirty="0"/>
+            <a:endParaRPr lang="ja-JP" sz="1050" dirty="0"/>
           </a:p>
         </p:txBody>
       </p:sp>
@@ -3080,7 +3080,7 @@
           </a:xfrm>
           <a:prstGeom prst="roundRect">
             <a:avLst>
-              <a:gd name="adj" fmla="val 15625"/>
+              <a:gd name="adj" fmla="val 7813"/>
             </a:avLst>
           </a:prstGeom>
           <a:solidFill>
@@ -3089,14 +3089,14 @@
           <a:ln/>
         </p:spPr>
         <p:txBody>
-          <a:bodyPr wrap="square" lIns="0" tIns="0" rIns="0" bIns="0" rtlCol="0" anchor="ctr"/>
+          <a:bodyPr wrap="none" lIns="0" tIns="0" rIns="0" bIns="0" rtlCol="0" anchor="ctr"/>
           <a:lstStyle/>
           <a:p>
             <a:pPr algn="ctr" indent="0" marL="0">
               <a:buNone/>
             </a:pPr>
             <a:r>
-              <a:rPr lang="ja-JP" altLang="en-US" sz="1100" dirty="0">
+              <a:rPr lang="ja-JP" altLang="en-US" sz="1050" dirty="0">
                 <a:solidFill>
                   <a:srgbClr val="404040"/>
                 </a:solidFill>
@@ -3106,14 +3106,14 @@
               </a:rPr>
               <a:t>フルマ</a:t>
             </a:r>
-            <a:endParaRPr lang="ja-JP" sz="1100" dirty="0"/>
+            <a:endParaRPr lang="ja-JP" sz="1050" dirty="0"/>
           </a:p>
           <a:p>
             <a:pPr algn="ctr" indent="0" marL="0">
               <a:buNone/>
             </a:pPr>
             <a:r>
-              <a:rPr lang="ja-JP" altLang="en-US" sz="1100" dirty="0">
+              <a:rPr lang="ja-JP" altLang="en-US" sz="1050" dirty="0">
                 <a:solidFill>
                   <a:srgbClr val="404040"/>
                 </a:solidFill>
@@ -3123,7 +3123,7 @@
               </a:rPr>
               <a:t>ゼニル</a:t>
             </a:r>
-            <a:endParaRPr lang="ja-JP" sz="1100" dirty="0"/>
+            <a:endParaRPr lang="ja-JP" sz="1050" dirty="0"/>
           </a:p>
         </p:txBody>
       </p:sp>
@@ -3140,7 +3140,7 @@
           </a:xfrm>
           <a:prstGeom prst="roundRect">
             <a:avLst>
-              <a:gd name="adj" fmla="val 15625"/>
+              <a:gd name="adj" fmla="val 7813"/>
             </a:avLst>
           </a:prstGeom>
           <a:solidFill>
@@ -3149,14 +3149,14 @@
           <a:ln/>
         </p:spPr>
         <p:txBody>
-          <a:bodyPr wrap="square" lIns="0" tIns="0" rIns="0" bIns="0" rtlCol="0" anchor="ctr"/>
+          <a:bodyPr wrap="none" lIns="0" tIns="0" rIns="0" bIns="0" rtlCol="0" anchor="ctr"/>
           <a:lstStyle/>
           <a:p>
             <a:pPr algn="ctr" indent="0" marL="0">
               <a:buNone/>
             </a:pPr>
             <a:r>
-              <a:rPr lang="ja-JP" altLang="en-US" sz="1100" dirty="0">
+              <a:rPr lang="ja-JP" altLang="en-US" sz="1050" dirty="0">
                 <a:solidFill>
                   <a:srgbClr val="404040"/>
                 </a:solidFill>
@@ -3166,7 +3166,7 @@
               </a:rPr>
               <a:t>落とし穴</a:t>
             </a:r>
-            <a:endParaRPr lang="ja-JP" sz="1100" dirty="0"/>
+            <a:endParaRPr lang="ja-JP" sz="1050" dirty="0"/>
           </a:p>
         </p:txBody>
       </p:sp>
@@ -3183,7 +3183,7 @@
           </a:xfrm>
           <a:prstGeom prst="roundRect">
             <a:avLst>
-              <a:gd name="adj" fmla="val 15625"/>
+              <a:gd name="adj" fmla="val 7813"/>
             </a:avLst>
           </a:prstGeom>
           <a:solidFill>
@@ -3192,14 +3192,14 @@
           <a:ln/>
         </p:spPr>
         <p:txBody>
-          <a:bodyPr wrap="square" lIns="0" tIns="0" rIns="0" bIns="0" rtlCol="0" anchor="ctr"/>
+          <a:bodyPr wrap="none" lIns="0" tIns="0" rIns="0" bIns="0" rtlCol="0" anchor="ctr"/>
           <a:lstStyle/>
           <a:p>
             <a:pPr algn="ctr" indent="0" marL="0">
               <a:buNone/>
             </a:pPr>
             <a:r>
-              <a:rPr lang="ja-JP" altLang="en-US" sz="1100" dirty="0">
+              <a:rPr lang="ja-JP" altLang="en-US" sz="1050" dirty="0">
                 <a:solidFill>
                   <a:srgbClr val="404040"/>
                 </a:solidFill>
@@ -3209,7 +3209,7 @@
               </a:rPr>
               <a:t>手順</a:t>
             </a:r>
-            <a:endParaRPr lang="ja-JP" sz="1100" dirty="0"/>
+            <a:endParaRPr lang="ja-JP" sz="1050" dirty="0"/>
           </a:p>
         </p:txBody>
       </p:sp>
@@ -3317,11 +3317,11 @@
         <p:spPr>
           <a:xfrm>
             <a:off x="502920" y="1691640"/>
-            <a:ext cx="3541827" cy="4032504"/>
+            <a:ext cx="3523539" cy="4032504"/>
           </a:xfrm>
           <a:prstGeom prst="roundRect">
             <a:avLst>
-              <a:gd name="adj" fmla="val 2065"/>
+              <a:gd name="adj" fmla="val 2076"/>
             </a:avLst>
           </a:prstGeom>
           <a:solidFill>
@@ -3338,8 +3338,8 @@
         </p:nvSpPr>
         <p:spPr>
           <a:xfrm>
-            <a:off x="630936" y="1837944"/>
-            <a:ext cx="3285795" cy="457200"/>
+            <a:off x="667512" y="1837944"/>
+            <a:ext cx="3194355" cy="457200"/>
           </a:xfrm>
           <a:prstGeom prst="rect">
             <a:avLst/>
@@ -3377,8 +3377,8 @@
         </p:nvSpPr>
         <p:spPr>
           <a:xfrm>
-            <a:off x="630936" y="2441448"/>
-            <a:ext cx="3285795" cy="420624"/>
+            <a:off x="667512" y="2441448"/>
+            <a:ext cx="3194355" cy="420624"/>
           </a:xfrm>
           <a:prstGeom prst="rect">
             <a:avLst/>
@@ -3438,8 +3438,8 @@
         </p:nvSpPr>
         <p:spPr>
           <a:xfrm>
-            <a:off x="630936" y="3145536"/>
-            <a:ext cx="3285795" cy="420624"/>
+            <a:off x="667512" y="3145536"/>
+            <a:ext cx="3194355" cy="420624"/>
           </a:xfrm>
           <a:prstGeom prst="rect">
             <a:avLst/>
@@ -3478,7 +3478,7 @@
         <p:spPr>
           <a:xfrm>
             <a:off x="905256" y="3566160"/>
-            <a:ext cx="3011475" cy="1307592"/>
+            <a:ext cx="2956611" cy="1307592"/>
           </a:xfrm>
           <a:prstGeom prst="rect">
             <a:avLst/>
@@ -3583,8 +3583,8 @@
         </p:nvSpPr>
         <p:spPr>
           <a:xfrm>
-            <a:off x="630936" y="5157216"/>
-            <a:ext cx="3285795" cy="420624"/>
+            <a:off x="667512" y="5157216"/>
+            <a:ext cx="3194355" cy="420624"/>
           </a:xfrm>
           <a:prstGeom prst="rect">
             <a:avLst/>
@@ -3622,12 +3622,12 @@
         </p:nvSpPr>
         <p:spPr>
           <a:xfrm>
-            <a:off x="4264203" y="1691640"/>
-            <a:ext cx="3541827" cy="4032504"/>
+            <a:off x="4245915" y="1691640"/>
+            <a:ext cx="3523539" cy="4032504"/>
           </a:xfrm>
           <a:prstGeom prst="roundRect">
             <a:avLst>
-              <a:gd name="adj" fmla="val 2065"/>
+              <a:gd name="adj" fmla="val 2076"/>
             </a:avLst>
           </a:prstGeom>
           <a:solidFill>
@@ -3644,8 +3644,8 @@
         </p:nvSpPr>
         <p:spPr>
           <a:xfrm>
-            <a:off x="4392219" y="1837944"/>
-            <a:ext cx="3285795" cy="457200"/>
+            <a:off x="4410507" y="1837944"/>
+            <a:ext cx="3194355" cy="457200"/>
           </a:xfrm>
           <a:prstGeom prst="rect">
             <a:avLst/>
@@ -3683,8 +3683,8 @@
         </p:nvSpPr>
         <p:spPr>
           <a:xfrm>
-            <a:off x="4392219" y="2441448"/>
-            <a:ext cx="3285795" cy="420624"/>
+            <a:off x="4410507" y="2441448"/>
+            <a:ext cx="3194355" cy="420624"/>
           </a:xfrm>
           <a:prstGeom prst="rect">
             <a:avLst/>
@@ -3722,8 +3722,8 @@
         </p:nvSpPr>
         <p:spPr>
           <a:xfrm>
-            <a:off x="4666539" y="2862072"/>
-            <a:ext cx="3011475" cy="420624"/>
+            <a:off x="4648251" y="2862072"/>
+            <a:ext cx="2956611" cy="420624"/>
           </a:xfrm>
           <a:prstGeom prst="rect">
             <a:avLst/>
@@ -3761,8 +3761,8 @@
         </p:nvSpPr>
         <p:spPr>
           <a:xfrm>
-            <a:off x="4392219" y="3593592"/>
-            <a:ext cx="3285795" cy="420624"/>
+            <a:off x="4410507" y="3593592"/>
+            <a:ext cx="3194355" cy="420624"/>
           </a:xfrm>
           <a:prstGeom prst="rect">
             <a:avLst/>
@@ -3811,8 +3811,8 @@
         </p:nvSpPr>
         <p:spPr>
           <a:xfrm>
-            <a:off x="4392219" y="4325112"/>
-            <a:ext cx="3285795" cy="420624"/>
+            <a:off x="4410507" y="4325112"/>
+            <a:ext cx="3194355" cy="420624"/>
           </a:xfrm>
           <a:prstGeom prst="rect">
             <a:avLst/>
@@ -3861,8 +3861,8 @@
         </p:nvSpPr>
         <p:spPr>
           <a:xfrm>
-            <a:off x="4666539" y="4745736"/>
-            <a:ext cx="3011475" cy="420624"/>
+            <a:off x="4648251" y="4745736"/>
+            <a:ext cx="2956611" cy="420624"/>
           </a:xfrm>
           <a:prstGeom prst="rect">
             <a:avLst/>
@@ -3900,12 +3900,12 @@
         </p:nvSpPr>
         <p:spPr>
           <a:xfrm>
-            <a:off x="8025486" y="1691640"/>
-            <a:ext cx="3660546" cy="4032504"/>
+            <a:off x="7988910" y="1691640"/>
+            <a:ext cx="3697122" cy="4032504"/>
           </a:xfrm>
           <a:prstGeom prst="roundRect">
             <a:avLst>
-              <a:gd name="adj" fmla="val 1998"/>
+              <a:gd name="adj" fmla="val 1979"/>
             </a:avLst>
           </a:prstGeom>
           <a:solidFill>
@@ -3923,7 +3923,7 @@
         <p:spPr>
           <a:xfrm>
             <a:off x="8153502" y="1837944"/>
-            <a:ext cx="3404514" cy="457200"/>
+            <a:ext cx="3367938" cy="457200"/>
           </a:xfrm>
           <a:prstGeom prst="rect">
             <a:avLst/>
@@ -3962,7 +3962,7 @@
         <p:spPr>
           <a:xfrm>
             <a:off x="8153502" y="2441448"/>
-            <a:ext cx="3404514" cy="420624"/>
+            <a:ext cx="3367938" cy="420624"/>
           </a:xfrm>
           <a:prstGeom prst="rect">
             <a:avLst/>
@@ -4000,7 +4000,7 @@
         </p:nvSpPr>
         <p:spPr>
           <a:xfrm>
-            <a:off x="8427822" y="2862072"/>
+            <a:off x="8391246" y="2862072"/>
             <a:ext cx="3130194" cy="420624"/>
           </a:xfrm>
           <a:prstGeom prst="rect">
@@ -4040,7 +4040,7 @@
         <p:spPr>
           <a:xfrm>
             <a:off x="8153502" y="3589020"/>
-            <a:ext cx="3404514" cy="420624"/>
+            <a:ext cx="3367938" cy="420624"/>
           </a:xfrm>
           <a:prstGeom prst="rect">
             <a:avLst/>
@@ -4078,7 +4078,7 @@
         </p:nvSpPr>
         <p:spPr>
           <a:xfrm>
-            <a:off x="8427822" y="4009644"/>
+            <a:off x="8391246" y="4009644"/>
             <a:ext cx="3130194" cy="420624"/>
           </a:xfrm>
           <a:prstGeom prst="rect">
@@ -4118,7 +4118,7 @@
         <p:spPr>
           <a:xfrm>
             <a:off x="8153502" y="4736592"/>
-            <a:ext cx="3404514" cy="420624"/>
+            <a:ext cx="3367938" cy="420624"/>
           </a:xfrm>
           <a:prstGeom prst="rect">
             <a:avLst/>
@@ -4156,7 +4156,7 @@
         </p:nvSpPr>
         <p:spPr>
           <a:xfrm>
-            <a:off x="8427822" y="5157216"/>
+            <a:off x="8391246" y="5157216"/>
             <a:ext cx="3130194" cy="420624"/>
           </a:xfrm>
           <a:prstGeom prst="rect">
@@ -4296,7 +4296,7 @@
           </a:xfrm>
           <a:prstGeom prst="roundRect">
             <a:avLst>
-              <a:gd name="adj" fmla="val 15625"/>
+              <a:gd name="adj" fmla="val 7813"/>
             </a:avLst>
           </a:prstGeom>
           <a:solidFill>
@@ -4305,14 +4305,14 @@
           <a:ln/>
         </p:spPr>
         <p:txBody>
-          <a:bodyPr wrap="square" lIns="0" tIns="0" rIns="0" bIns="0" rtlCol="0" anchor="ctr"/>
+          <a:bodyPr wrap="none" lIns="0" tIns="0" rIns="0" bIns="0" rtlCol="0" anchor="ctr"/>
           <a:lstStyle/>
           <a:p>
             <a:pPr algn="ctr" indent="0" marL="0">
               <a:buNone/>
             </a:pPr>
             <a:r>
-              <a:rPr lang="ja-JP" altLang="en-US" sz="1100" dirty="0">
+              <a:rPr lang="ja-JP" altLang="en-US" sz="1050" dirty="0">
                 <a:solidFill>
                   <a:srgbClr val="404040"/>
                 </a:solidFill>
@@ -4322,7 +4322,7 @@
               </a:rPr>
               <a:t>考え方</a:t>
             </a:r>
-            <a:endParaRPr lang="ja-JP" sz="1100" dirty="0"/>
+            <a:endParaRPr lang="ja-JP" sz="1050" dirty="0"/>
           </a:p>
         </p:txBody>
       </p:sp>
@@ -4339,7 +4339,7 @@
           </a:xfrm>
           <a:prstGeom prst="roundRect">
             <a:avLst>
-              <a:gd name="adj" fmla="val 15625"/>
+              <a:gd name="adj" fmla="val 7813"/>
             </a:avLst>
           </a:prstGeom>
           <a:solidFill>
@@ -4348,14 +4348,14 @@
           <a:ln/>
         </p:spPr>
         <p:txBody>
-          <a:bodyPr wrap="square" lIns="0" tIns="0" rIns="0" bIns="0" rtlCol="0" anchor="ctr"/>
+          <a:bodyPr wrap="none" lIns="0" tIns="0" rIns="0" bIns="0" rtlCol="0" anchor="ctr"/>
           <a:lstStyle/>
           <a:p>
             <a:pPr algn="ctr" indent="0" marL="0">
               <a:buNone/>
             </a:pPr>
             <a:r>
-              <a:rPr lang="ja-JP" altLang="en-US" sz="1100" b="1" dirty="0">
+              <a:rPr lang="ja-JP" altLang="en-US" sz="1050" b="1" dirty="0">
                 <a:solidFill>
                   <a:srgbClr val="FFFFFF"/>
                 </a:solidFill>
@@ -4365,14 +4365,14 @@
               </a:rPr>
               <a:t>ナロ</a:t>
             </a:r>
-            <a:endParaRPr lang="ja-JP" sz="1100" dirty="0"/>
+            <a:endParaRPr lang="ja-JP" sz="1050" dirty="0"/>
           </a:p>
           <a:p>
             <a:pPr algn="ctr" indent="0" marL="0">
               <a:buNone/>
             </a:pPr>
             <a:r>
-              <a:rPr lang="ja-JP" altLang="en-US" sz="1100" b="1" dirty="0">
+              <a:rPr lang="ja-JP" altLang="en-US" sz="1050" b="1" dirty="0">
                 <a:solidFill>
                   <a:srgbClr val="FFFFFF"/>
                 </a:solidFill>
@@ -4382,7 +4382,7 @@
               </a:rPr>
               <a:t>キソン</a:t>
             </a:r>
-            <a:endParaRPr lang="ja-JP" sz="1100" dirty="0"/>
+            <a:endParaRPr lang="ja-JP" sz="1050" dirty="0"/>
           </a:p>
         </p:txBody>
       </p:sp>
@@ -4399,7 +4399,7 @@
           </a:xfrm>
           <a:prstGeom prst="roundRect">
             <a:avLst>
-              <a:gd name="adj" fmla="val 15625"/>
+              <a:gd name="adj" fmla="val 7813"/>
             </a:avLst>
           </a:prstGeom>
           <a:solidFill>
@@ -4408,14 +4408,14 @@
           <a:ln/>
         </p:spPr>
         <p:txBody>
-          <a:bodyPr wrap="square" lIns="0" tIns="0" rIns="0" bIns="0" rtlCol="0" anchor="ctr"/>
+          <a:bodyPr wrap="none" lIns="0" tIns="0" rIns="0" bIns="0" rtlCol="0" anchor="ctr"/>
           <a:lstStyle/>
           <a:p>
             <a:pPr algn="ctr" indent="0" marL="0">
               <a:buNone/>
             </a:pPr>
             <a:r>
-              <a:rPr lang="ja-JP" altLang="en-US" sz="1100" dirty="0">
+              <a:rPr lang="ja-JP" altLang="en-US" sz="1050" dirty="0">
                 <a:solidFill>
                   <a:srgbClr val="404040"/>
                 </a:solidFill>
@@ -4425,14 +4425,14 @@
               </a:rPr>
               <a:t>フルマ</a:t>
             </a:r>
-            <a:endParaRPr lang="ja-JP" sz="1100" dirty="0"/>
+            <a:endParaRPr lang="ja-JP" sz="1050" dirty="0"/>
           </a:p>
           <a:p>
             <a:pPr algn="ctr" indent="0" marL="0">
               <a:buNone/>
             </a:pPr>
             <a:r>
-              <a:rPr lang="ja-JP" altLang="en-US" sz="1100" dirty="0">
+              <a:rPr lang="ja-JP" altLang="en-US" sz="1050" dirty="0">
                 <a:solidFill>
                   <a:srgbClr val="404040"/>
                 </a:solidFill>
@@ -4442,7 +4442,7 @@
               </a:rPr>
               <a:t>ゼニル</a:t>
             </a:r>
-            <a:endParaRPr lang="ja-JP" sz="1100" dirty="0"/>
+            <a:endParaRPr lang="ja-JP" sz="1050" dirty="0"/>
           </a:p>
         </p:txBody>
       </p:sp>
@@ -4459,7 +4459,7 @@
           </a:xfrm>
           <a:prstGeom prst="roundRect">
             <a:avLst>
-              <a:gd name="adj" fmla="val 15625"/>
+              <a:gd name="adj" fmla="val 7813"/>
             </a:avLst>
           </a:prstGeom>
           <a:solidFill>
@@ -4468,14 +4468,14 @@
           <a:ln/>
         </p:spPr>
         <p:txBody>
-          <a:bodyPr wrap="square" lIns="0" tIns="0" rIns="0" bIns="0" rtlCol="0" anchor="ctr"/>
+          <a:bodyPr wrap="none" lIns="0" tIns="0" rIns="0" bIns="0" rtlCol="0" anchor="ctr"/>
           <a:lstStyle/>
           <a:p>
             <a:pPr algn="ctr" indent="0" marL="0">
               <a:buNone/>
             </a:pPr>
             <a:r>
-              <a:rPr lang="ja-JP" altLang="en-US" sz="1100" dirty="0">
+              <a:rPr lang="ja-JP" altLang="en-US" sz="1050" dirty="0">
                 <a:solidFill>
                   <a:srgbClr val="404040"/>
                 </a:solidFill>
@@ -4485,7 +4485,7 @@
               </a:rPr>
               <a:t>落とし穴</a:t>
             </a:r>
-            <a:endParaRPr lang="ja-JP" sz="1100" dirty="0"/>
+            <a:endParaRPr lang="ja-JP" sz="1050" dirty="0"/>
           </a:p>
         </p:txBody>
       </p:sp>
@@ -4502,7 +4502,7 @@
           </a:xfrm>
           <a:prstGeom prst="roundRect">
             <a:avLst>
-              <a:gd name="adj" fmla="val 15625"/>
+              <a:gd name="adj" fmla="val 7813"/>
             </a:avLst>
           </a:prstGeom>
           <a:solidFill>
@@ -4511,14 +4511,14 @@
           <a:ln/>
         </p:spPr>
         <p:txBody>
-          <a:bodyPr wrap="square" lIns="0" tIns="0" rIns="0" bIns="0" rtlCol="0" anchor="ctr"/>
+          <a:bodyPr wrap="none" lIns="0" tIns="0" rIns="0" bIns="0" rtlCol="0" anchor="ctr"/>
           <a:lstStyle/>
           <a:p>
             <a:pPr algn="ctr" indent="0" marL="0">
               <a:buNone/>
             </a:pPr>
             <a:r>
-              <a:rPr lang="ja-JP" altLang="en-US" sz="1100" dirty="0">
+              <a:rPr lang="ja-JP" altLang="en-US" sz="1050" dirty="0">
                 <a:solidFill>
                   <a:srgbClr val="404040"/>
                 </a:solidFill>
@@ -4528,7 +4528,7 @@
               </a:rPr>
               <a:t>手順</a:t>
             </a:r>
-            <a:endParaRPr lang="ja-JP" sz="1100" dirty="0"/>
+            <a:endParaRPr lang="ja-JP" sz="1050" dirty="0"/>
           </a:p>
         </p:txBody>
       </p:sp>
@@ -4736,7 +4736,7 @@
         <p:spPr>
           <a:xfrm>
             <a:off x="1014984" y="3072384"/>
-            <a:ext cx="5065776" cy="914400"/>
+            <a:ext cx="5065776" cy="457200"/>
           </a:xfrm>
           <a:prstGeom prst="rect">
             <a:avLst/>
@@ -4783,23 +4783,6 @@
                 <a:cs typeface="メイリオ" pitchFamily="34" charset="-120"/>
               </a:rPr>
               <a:t>など。</a:t>
-            </a:r>
-            <a:endParaRPr lang="ja-JP" sz="2400" dirty="0"/>
-          </a:p>
-          <a:p>
-            <a:pPr algn="l" indent="0" marL="0">
-              <a:buNone/>
-            </a:pPr>
-            <a:r>
-              <a:rPr lang="ja-JP" altLang="en-US" sz="2400" dirty="0">
-                <a:solidFill>
-                  <a:srgbClr val="262626"/>
-                </a:solidFill>
-                <a:latin typeface="メイリオ" pitchFamily="34" charset="0"/>
-                <a:ea typeface="メイリオ" pitchFamily="34" charset="-122"/>
-                <a:cs typeface="メイリオ" pitchFamily="34" charset="-120"/>
-              </a:rPr>
-              <a:t>施設基準で）</a:t>
             </a:r>
             <a:endParaRPr lang="ja-JP" sz="2400" dirty="0"/>
           </a:p>
@@ -4813,6 +4796,45 @@
         </p:nvSpPr>
         <p:spPr>
           <a:xfrm>
+            <a:off x="1319784" y="3529584"/>
+            <a:ext cx="4760976" cy="457200"/>
+          </a:xfrm>
+          <a:prstGeom prst="rect">
+            <a:avLst/>
+          </a:prstGeom>
+          <a:noFill/>
+          <a:ln/>
+        </p:spPr>
+        <p:txBody>
+          <a:bodyPr wrap="square" lIns="0" tIns="0" rIns="0" bIns="0" rtlCol="0" anchor="t"/>
+          <a:lstStyle/>
+          <a:p>
+            <a:pPr algn="l" indent="0" marL="0">
+              <a:buNone/>
+            </a:pPr>
+            <a:r>
+              <a:rPr lang="ja-JP" altLang="en-US" sz="2400" dirty="0">
+                <a:solidFill>
+                  <a:srgbClr val="262626"/>
+                </a:solidFill>
+                <a:latin typeface="メイリオ" pitchFamily="34" charset="0"/>
+                <a:ea typeface="メイリオ" pitchFamily="34" charset="-122"/>
+                <a:cs typeface="メイリオ" pitchFamily="34" charset="-120"/>
+              </a:rPr>
+              <a:t>施設基準で）</a:t>
+            </a:r>
+            <a:endParaRPr lang="ja-JP" sz="2400" dirty="0"/>
+          </a:p>
+        </p:txBody>
+      </p:sp>
+      <p:sp>
+        <p:nvSpPr>
+          <p:cNvPr id="16" name="Text 14"/>
+          <p:cNvSpPr txBox="1"/>
+          <p:nvPr/>
+        </p:nvSpPr>
+        <p:spPr>
+          <a:xfrm>
             <a:off x="685800" y="4306824"/>
             <a:ext cx="5394960" cy="457200"/>
           </a:xfrm>
@@ -4846,7 +4868,7 @@
       </p:sp>
       <p:sp>
         <p:nvSpPr>
-          <p:cNvPr id="16" name="Text 14"/>
+          <p:cNvPr id="17" name="Text 15"/>
           <p:cNvSpPr txBox="1"/>
           <p:nvPr/>
         </p:nvSpPr>
@@ -4885,7 +4907,7 @@
       </p:sp>
       <p:sp>
         <p:nvSpPr>
-          <p:cNvPr id="17" name="Shape 15"/>
+          <p:cNvPr id="18" name="Shape 16"/>
           <p:cNvSpPr/>
           <p:nvPr/>
         </p:nvSpPr>
@@ -4907,7 +4929,7 @@
       </p:sp>
       <p:sp>
         <p:nvSpPr>
-          <p:cNvPr id="18" name="Text 16"/>
+          <p:cNvPr id="19" name="Text 17"/>
           <p:cNvSpPr txBox="1"/>
           <p:nvPr/>
         </p:nvSpPr>
@@ -4946,7 +4968,7 @@
       </p:sp>
       <p:sp>
         <p:nvSpPr>
-          <p:cNvPr id="19" name="Text 17"/>
+          <p:cNvPr id="20" name="Text 18"/>
           <p:cNvSpPr txBox="1"/>
           <p:nvPr/>
         </p:nvSpPr>
@@ -4985,7 +5007,7 @@
       </p:sp>
       <p:sp>
         <p:nvSpPr>
-          <p:cNvPr id="20" name="Text 18"/>
+          <p:cNvPr id="21" name="Text 19"/>
           <p:cNvSpPr txBox="1"/>
           <p:nvPr/>
         </p:nvSpPr>
@@ -5024,7 +5046,7 @@
       </p:sp>
       <p:sp>
         <p:nvSpPr>
-          <p:cNvPr id="21" name="Text 19"/>
+          <p:cNvPr id="22" name="Text 20"/>
           <p:cNvSpPr txBox="1"/>
           <p:nvPr/>
         </p:nvSpPr>
@@ -5063,7 +5085,7 @@
       </p:sp>
       <p:sp>
         <p:nvSpPr>
-          <p:cNvPr id="22" name="Text 20"/>
+          <p:cNvPr id="23" name="Text 21"/>
           <p:cNvSpPr txBox="1"/>
           <p:nvPr/>
         </p:nvSpPr>
@@ -5209,7 +5231,7 @@
           </a:xfrm>
           <a:prstGeom prst="roundRect">
             <a:avLst>
-              <a:gd name="adj" fmla="val 15625"/>
+              <a:gd name="adj" fmla="val 7813"/>
             </a:avLst>
           </a:prstGeom>
           <a:solidFill>
@@ -5218,14 +5240,14 @@
           <a:ln/>
         </p:spPr>
         <p:txBody>
-          <a:bodyPr wrap="square" lIns="0" tIns="0" rIns="0" bIns="0" rtlCol="0" anchor="ctr"/>
+          <a:bodyPr wrap="none" lIns="0" tIns="0" rIns="0" bIns="0" rtlCol="0" anchor="ctr"/>
           <a:lstStyle/>
           <a:p>
             <a:pPr algn="ctr" indent="0" marL="0">
               <a:buNone/>
             </a:pPr>
             <a:r>
-              <a:rPr lang="ja-JP" altLang="en-US" sz="1100" dirty="0">
+              <a:rPr lang="ja-JP" altLang="en-US" sz="1050" dirty="0">
                 <a:solidFill>
                   <a:srgbClr val="404040"/>
                 </a:solidFill>
@@ -5235,7 +5257,7 @@
               </a:rPr>
               <a:t>考え方</a:t>
             </a:r>
-            <a:endParaRPr lang="ja-JP" sz="1100" dirty="0"/>
+            <a:endParaRPr lang="ja-JP" sz="1050" dirty="0"/>
           </a:p>
         </p:txBody>
       </p:sp>
@@ -5252,7 +5274,7 @@
           </a:xfrm>
           <a:prstGeom prst="roundRect">
             <a:avLst>
-              <a:gd name="adj" fmla="val 15625"/>
+              <a:gd name="adj" fmla="val 7813"/>
             </a:avLst>
           </a:prstGeom>
           <a:solidFill>
@@ -5261,14 +5283,14 @@
           <a:ln/>
         </p:spPr>
         <p:txBody>
-          <a:bodyPr wrap="square" lIns="0" tIns="0" rIns="0" bIns="0" rtlCol="0" anchor="ctr"/>
+          <a:bodyPr wrap="none" lIns="0" tIns="0" rIns="0" bIns="0" rtlCol="0" anchor="ctr"/>
           <a:lstStyle/>
           <a:p>
             <a:pPr algn="ctr" indent="0" marL="0">
               <a:buNone/>
             </a:pPr>
             <a:r>
-              <a:rPr lang="ja-JP" altLang="en-US" sz="1100" dirty="0">
+              <a:rPr lang="ja-JP" altLang="en-US" sz="1050" dirty="0">
                 <a:solidFill>
                   <a:srgbClr val="404040"/>
                 </a:solidFill>
@@ -5278,14 +5300,14 @@
               </a:rPr>
               <a:t>ナロ</a:t>
             </a:r>
-            <a:endParaRPr lang="ja-JP" sz="1100" dirty="0"/>
+            <a:endParaRPr lang="ja-JP" sz="1050" dirty="0"/>
           </a:p>
           <a:p>
             <a:pPr algn="ctr" indent="0" marL="0">
               <a:buNone/>
             </a:pPr>
             <a:r>
-              <a:rPr lang="ja-JP" altLang="en-US" sz="1100" dirty="0">
+              <a:rPr lang="ja-JP" altLang="en-US" sz="1050" dirty="0">
                 <a:solidFill>
                   <a:srgbClr val="404040"/>
                 </a:solidFill>
@@ -5295,7 +5317,7 @@
               </a:rPr>
               <a:t>キソン</a:t>
             </a:r>
-            <a:endParaRPr lang="ja-JP" sz="1100" dirty="0"/>
+            <a:endParaRPr lang="ja-JP" sz="1050" dirty="0"/>
           </a:p>
         </p:txBody>
       </p:sp>
@@ -5312,7 +5334,7 @@
           </a:xfrm>
           <a:prstGeom prst="roundRect">
             <a:avLst>
-              <a:gd name="adj" fmla="val 15625"/>
+              <a:gd name="adj" fmla="val 7813"/>
             </a:avLst>
           </a:prstGeom>
           <a:solidFill>
@@ -5321,14 +5343,14 @@
           <a:ln/>
         </p:spPr>
         <p:txBody>
-          <a:bodyPr wrap="square" lIns="0" tIns="0" rIns="0" bIns="0" rtlCol="0" anchor="ctr"/>
+          <a:bodyPr wrap="none" lIns="0" tIns="0" rIns="0" bIns="0" rtlCol="0" anchor="ctr"/>
           <a:lstStyle/>
           <a:p>
             <a:pPr algn="ctr" indent="0" marL="0">
               <a:buNone/>
             </a:pPr>
             <a:r>
-              <a:rPr lang="ja-JP" altLang="en-US" sz="1100" b="1" dirty="0">
+              <a:rPr lang="ja-JP" altLang="en-US" sz="1050" b="1" dirty="0">
                 <a:solidFill>
                   <a:srgbClr val="FFFFFF"/>
                 </a:solidFill>
@@ -5338,14 +5360,14 @@
               </a:rPr>
               <a:t>フルマ</a:t>
             </a:r>
-            <a:endParaRPr lang="ja-JP" sz="1100" dirty="0"/>
+            <a:endParaRPr lang="ja-JP" sz="1050" dirty="0"/>
           </a:p>
           <a:p>
             <a:pPr algn="ctr" indent="0" marL="0">
               <a:buNone/>
             </a:pPr>
             <a:r>
-              <a:rPr lang="ja-JP" altLang="en-US" sz="1100" b="1" dirty="0">
+              <a:rPr lang="ja-JP" altLang="en-US" sz="1050" b="1" dirty="0">
                 <a:solidFill>
                   <a:srgbClr val="FFFFFF"/>
                 </a:solidFill>
@@ -5355,7 +5377,7 @@
               </a:rPr>
               <a:t>ゼニル</a:t>
             </a:r>
-            <a:endParaRPr lang="ja-JP" sz="1100" dirty="0"/>
+            <a:endParaRPr lang="ja-JP" sz="1050" dirty="0"/>
           </a:p>
         </p:txBody>
       </p:sp>
@@ -5372,7 +5394,7 @@
           </a:xfrm>
           <a:prstGeom prst="roundRect">
             <a:avLst>
-              <a:gd name="adj" fmla="val 15625"/>
+              <a:gd name="adj" fmla="val 7813"/>
             </a:avLst>
           </a:prstGeom>
           <a:solidFill>
@@ -5381,14 +5403,14 @@
           <a:ln/>
         </p:spPr>
         <p:txBody>
-          <a:bodyPr wrap="square" lIns="0" tIns="0" rIns="0" bIns="0" rtlCol="0" anchor="ctr"/>
+          <a:bodyPr wrap="none" lIns="0" tIns="0" rIns="0" bIns="0" rtlCol="0" anchor="ctr"/>
           <a:lstStyle/>
           <a:p>
             <a:pPr algn="ctr" indent="0" marL="0">
               <a:buNone/>
             </a:pPr>
             <a:r>
-              <a:rPr lang="ja-JP" altLang="en-US" sz="1100" dirty="0">
+              <a:rPr lang="ja-JP" altLang="en-US" sz="1050" dirty="0">
                 <a:solidFill>
                   <a:srgbClr val="404040"/>
                 </a:solidFill>
@@ -5398,7 +5420,7 @@
               </a:rPr>
               <a:t>落とし穴</a:t>
             </a:r>
-            <a:endParaRPr lang="ja-JP" sz="1100" dirty="0"/>
+            <a:endParaRPr lang="ja-JP" sz="1050" dirty="0"/>
           </a:p>
         </p:txBody>
       </p:sp>
@@ -5415,7 +5437,7 @@
           </a:xfrm>
           <a:prstGeom prst="roundRect">
             <a:avLst>
-              <a:gd name="adj" fmla="val 15625"/>
+              <a:gd name="adj" fmla="val 7813"/>
             </a:avLst>
           </a:prstGeom>
           <a:solidFill>
@@ -5424,14 +5446,14 @@
           <a:ln/>
         </p:spPr>
         <p:txBody>
-          <a:bodyPr wrap="square" lIns="0" tIns="0" rIns="0" bIns="0" rtlCol="0" anchor="ctr"/>
+          <a:bodyPr wrap="none" lIns="0" tIns="0" rIns="0" bIns="0" rtlCol="0" anchor="ctr"/>
           <a:lstStyle/>
           <a:p>
             <a:pPr algn="ctr" indent="0" marL="0">
               <a:buNone/>
             </a:pPr>
             <a:r>
-              <a:rPr lang="ja-JP" altLang="en-US" sz="1100" dirty="0">
+              <a:rPr lang="ja-JP" altLang="en-US" sz="1050" dirty="0">
                 <a:solidFill>
                   <a:srgbClr val="404040"/>
                 </a:solidFill>
@@ -5441,7 +5463,7 @@
               </a:rPr>
               <a:t>手順</a:t>
             </a:r>
-            <a:endParaRPr lang="ja-JP" sz="1100" dirty="0"/>
+            <a:endParaRPr lang="ja-JP" sz="1050" dirty="0"/>
           </a:p>
         </p:txBody>
       </p:sp>
@@ -5549,11 +5571,11 @@
         <p:spPr>
           <a:xfrm>
             <a:off x="502920" y="1691640"/>
-            <a:ext cx="3873337" cy="4032504"/>
+            <a:ext cx="3728496" cy="4032504"/>
           </a:xfrm>
           <a:prstGeom prst="roundRect">
             <a:avLst>
-              <a:gd name="adj" fmla="val 1889"/>
+              <a:gd name="adj" fmla="val 1962"/>
             </a:avLst>
           </a:prstGeom>
           <a:solidFill>
@@ -5570,8 +5592,8 @@
         </p:nvSpPr>
         <p:spPr>
           <a:xfrm>
-            <a:off x="630936" y="1837944"/>
-            <a:ext cx="3617305" cy="457200"/>
+            <a:off x="667512" y="1837944"/>
+            <a:ext cx="3399312" cy="457200"/>
           </a:xfrm>
           <a:prstGeom prst="rect">
             <a:avLst/>
@@ -5609,8 +5631,8 @@
         </p:nvSpPr>
         <p:spPr>
           <a:xfrm>
-            <a:off x="630936" y="2441448"/>
-            <a:ext cx="3617305" cy="420624"/>
+            <a:off x="667512" y="2441448"/>
+            <a:ext cx="3399312" cy="420624"/>
           </a:xfrm>
           <a:prstGeom prst="rect">
             <a:avLst/>
@@ -5671,7 +5693,7 @@
         <p:spPr>
           <a:xfrm>
             <a:off x="905256" y="2862072"/>
-            <a:ext cx="3342985" cy="420624"/>
+            <a:ext cx="3161568" cy="420624"/>
           </a:xfrm>
           <a:prstGeom prst="rect">
             <a:avLst/>
@@ -5709,8 +5731,8 @@
         </p:nvSpPr>
         <p:spPr>
           <a:xfrm>
-            <a:off x="630936" y="3378708"/>
-            <a:ext cx="3617305" cy="420624"/>
+            <a:off x="667512" y="3378708"/>
+            <a:ext cx="3399312" cy="420624"/>
           </a:xfrm>
           <a:prstGeom prst="rect">
             <a:avLst/>
@@ -5745,7 +5767,7 @@
                 <a:ea typeface="メイリオ" pitchFamily="34" charset="-122"/>
                 <a:cs typeface="メイリオ" pitchFamily="34" charset="-120"/>
               </a:rPr>
-              <a:t>以内に</a:t>
+              <a:t>以内に覚醒なければ</a:t>
             </a:r>
             <a:endParaRPr lang="ja-JP" sz="2200" dirty="0"/>
           </a:p>
@@ -5760,7 +5782,7 @@
         <p:spPr>
           <a:xfrm>
             <a:off x="905256" y="3799332"/>
-            <a:ext cx="3342985" cy="841248"/>
+            <a:ext cx="3161568" cy="420624"/>
           </a:xfrm>
           <a:prstGeom prst="rect">
             <a:avLst/>
@@ -5771,23 +5793,6 @@
         <p:txBody>
           <a:bodyPr wrap="square" lIns="0" tIns="0" rIns="0" bIns="0" rtlCol="0" anchor="t"/>
           <a:lstStyle/>
-          <a:p>
-            <a:pPr algn="l" indent="0" marL="0">
-              <a:buNone/>
-            </a:pPr>
-            <a:r>
-              <a:rPr lang="ja-JP" altLang="en-US" sz="2200" dirty="0">
-                <a:solidFill>
-                  <a:srgbClr val="262626"/>
-                </a:solidFill>
-                <a:latin typeface="メイリオ" pitchFamily="34" charset="0"/>
-                <a:ea typeface="メイリオ" pitchFamily="34" charset="-122"/>
-                <a:cs typeface="メイリオ" pitchFamily="34" charset="-120"/>
-              </a:rPr>
-              <a:t>覚醒なければ</a:t>
-            </a:r>
-            <a:endParaRPr lang="ja-JP" sz="2200" dirty="0"/>
-          </a:p>
           <a:p>
             <a:pPr algn="l" indent="0" marL="0">
               <a:buNone/>
@@ -5826,8 +5831,8 @@
         </p:nvSpPr>
         <p:spPr>
           <a:xfrm>
-            <a:off x="630936" y="4736592"/>
-            <a:ext cx="3617305" cy="420624"/>
+            <a:off x="667512" y="4315968"/>
+            <a:ext cx="3399312" cy="420624"/>
           </a:xfrm>
           <a:prstGeom prst="rect">
             <a:avLst/>
@@ -5887,8 +5892,8 @@
         </p:nvSpPr>
         <p:spPr>
           <a:xfrm>
-            <a:off x="905256" y="5157216"/>
-            <a:ext cx="3342985" cy="420624"/>
+            <a:off x="905256" y="4736592"/>
+            <a:ext cx="3161568" cy="841248"/>
           </a:xfrm>
           <a:prstGeom prst="rect">
             <a:avLst/>
@@ -5923,7 +5928,24 @@
                 <a:ea typeface="メイリオ" pitchFamily="34" charset="-122"/>
                 <a:cs typeface="メイリオ" pitchFamily="34" charset="-120"/>
               </a:rPr>
-              <a:t>、総量 </a:t>
+              <a:t>、</a:t>
+            </a:r>
+            <a:endParaRPr lang="ja-JP" sz="2200" dirty="0"/>
+          </a:p>
+          <a:p>
+            <a:pPr algn="l" indent="0" marL="0">
+              <a:buNone/>
+            </a:pPr>
+            <a:r>
+              <a:rPr lang="ja-JP" altLang="en-US" sz="2200" dirty="0">
+                <a:solidFill>
+                  <a:srgbClr val="262626"/>
+                </a:solidFill>
+                <a:latin typeface="メイリオ" pitchFamily="34" charset="0"/>
+                <a:ea typeface="メイリオ" pitchFamily="34" charset="-122"/>
+                <a:cs typeface="メイリオ" pitchFamily="34" charset="-120"/>
+              </a:rPr>
+              <a:t>総量 </a:t>
             </a:r>
             <a:r>
               <a:rPr lang="ja-JP" altLang="en-US" sz="2200" b="1" dirty="0">
@@ -5959,12 +5981,12 @@
         </p:nvSpPr>
         <p:spPr>
           <a:xfrm>
-            <a:off x="4595713" y="1691640"/>
-            <a:ext cx="3210316" cy="4032504"/>
+            <a:off x="4450872" y="1691640"/>
+            <a:ext cx="3318581" cy="4032504"/>
           </a:xfrm>
           <a:prstGeom prst="roundRect">
             <a:avLst>
-              <a:gd name="adj" fmla="val 2279"/>
+              <a:gd name="adj" fmla="val 2204"/>
             </a:avLst>
           </a:prstGeom>
           <a:solidFill>
@@ -5981,8 +6003,8 @@
         </p:nvSpPr>
         <p:spPr>
           <a:xfrm>
-            <a:off x="4723729" y="1837944"/>
-            <a:ext cx="2954284" cy="457200"/>
+            <a:off x="4615464" y="1837944"/>
+            <a:ext cx="2989397" cy="457200"/>
           </a:xfrm>
           <a:prstGeom prst="rect">
             <a:avLst/>
@@ -6020,8 +6042,8 @@
         </p:nvSpPr>
         <p:spPr>
           <a:xfrm>
-            <a:off x="4723729" y="2441448"/>
-            <a:ext cx="2954284" cy="420624"/>
+            <a:off x="4615464" y="2441448"/>
+            <a:ext cx="2989397" cy="420624"/>
           </a:xfrm>
           <a:prstGeom prst="rect">
             <a:avLst/>
@@ -6059,8 +6081,8 @@
         </p:nvSpPr>
         <p:spPr>
           <a:xfrm>
-            <a:off x="4998049" y="2862072"/>
-            <a:ext cx="2679964" cy="841248"/>
+            <a:off x="4853208" y="2862072"/>
+            <a:ext cx="2751653" cy="841248"/>
           </a:xfrm>
           <a:prstGeom prst="rect">
             <a:avLst/>
@@ -6115,8 +6137,8 @@
         </p:nvSpPr>
         <p:spPr>
           <a:xfrm>
-            <a:off x="4723729" y="4014216"/>
-            <a:ext cx="2954284" cy="420624"/>
+            <a:off x="4615464" y="4014216"/>
+            <a:ext cx="2989397" cy="420624"/>
           </a:xfrm>
           <a:prstGeom prst="rect">
             <a:avLst/>
@@ -6165,8 +6187,8 @@
         </p:nvSpPr>
         <p:spPr>
           <a:xfrm>
-            <a:off x="4723729" y="4745736"/>
-            <a:ext cx="2954284" cy="420624"/>
+            <a:off x="4615464" y="4745736"/>
+            <a:ext cx="2989397" cy="420624"/>
           </a:xfrm>
           <a:prstGeom prst="rect">
             <a:avLst/>
@@ -6215,12 +6237,12 @@
         </p:nvSpPr>
         <p:spPr>
           <a:xfrm>
-            <a:off x="8025486" y="1691640"/>
-            <a:ext cx="3660546" cy="4032504"/>
+            <a:off x="7988910" y="1691640"/>
+            <a:ext cx="3697122" cy="4032504"/>
           </a:xfrm>
           <a:prstGeom prst="roundRect">
             <a:avLst>
-              <a:gd name="adj" fmla="val 1998"/>
+              <a:gd name="adj" fmla="val 1979"/>
             </a:avLst>
           </a:prstGeom>
           <a:solidFill>
@@ -6238,7 +6260,7 @@
         <p:spPr>
           <a:xfrm>
             <a:off x="8153502" y="1837944"/>
-            <a:ext cx="3404514" cy="457200"/>
+            <a:ext cx="3367938" cy="457200"/>
           </a:xfrm>
           <a:prstGeom prst="rect">
             <a:avLst/>
@@ -6277,7 +6299,7 @@
         <p:spPr>
           <a:xfrm>
             <a:off x="8153502" y="2441448"/>
-            <a:ext cx="3404514" cy="420624"/>
+            <a:ext cx="3367938" cy="420624"/>
           </a:xfrm>
           <a:prstGeom prst="rect">
             <a:avLst/>
@@ -6315,7 +6337,7 @@
         </p:nvSpPr>
         <p:spPr>
           <a:xfrm>
-            <a:off x="8427822" y="2862072"/>
+            <a:off x="8391246" y="2862072"/>
             <a:ext cx="3130194" cy="420624"/>
           </a:xfrm>
           <a:prstGeom prst="rect">
@@ -6355,7 +6377,7 @@
         <p:spPr>
           <a:xfrm>
             <a:off x="8153502" y="3589020"/>
-            <a:ext cx="3404514" cy="420624"/>
+            <a:ext cx="3367938" cy="420624"/>
           </a:xfrm>
           <a:prstGeom prst="rect">
             <a:avLst/>
@@ -6393,7 +6415,7 @@
         </p:nvSpPr>
         <p:spPr>
           <a:xfrm>
-            <a:off x="8427822" y="4009644"/>
+            <a:off x="8391246" y="4009644"/>
             <a:ext cx="3130194" cy="420624"/>
           </a:xfrm>
           <a:prstGeom prst="rect">
@@ -6433,7 +6455,7 @@
         <p:spPr>
           <a:xfrm>
             <a:off x="8153502" y="4736592"/>
-            <a:ext cx="3404514" cy="420624"/>
+            <a:ext cx="3367938" cy="420624"/>
           </a:xfrm>
           <a:prstGeom prst="rect">
             <a:avLst/>
@@ -6471,7 +6493,7 @@
         </p:nvSpPr>
         <p:spPr>
           <a:xfrm>
-            <a:off x="8427822" y="5157216"/>
+            <a:off x="8391246" y="5157216"/>
             <a:ext cx="3130194" cy="420624"/>
           </a:xfrm>
           <a:prstGeom prst="rect">
@@ -6611,7 +6633,7 @@
           </a:xfrm>
           <a:prstGeom prst="roundRect">
             <a:avLst>
-              <a:gd name="adj" fmla="val 15625"/>
+              <a:gd name="adj" fmla="val 7813"/>
             </a:avLst>
           </a:prstGeom>
           <a:solidFill>
@@ -6620,14 +6642,14 @@
           <a:ln/>
         </p:spPr>
         <p:txBody>
-          <a:bodyPr wrap="square" lIns="0" tIns="0" rIns="0" bIns="0" rtlCol="0" anchor="ctr"/>
+          <a:bodyPr wrap="none" lIns="0" tIns="0" rIns="0" bIns="0" rtlCol="0" anchor="ctr"/>
           <a:lstStyle/>
           <a:p>
             <a:pPr algn="ctr" indent="0" marL="0">
               <a:buNone/>
             </a:pPr>
             <a:r>
-              <a:rPr lang="ja-JP" altLang="en-US" sz="1100" dirty="0">
+              <a:rPr lang="ja-JP" altLang="en-US" sz="1050" dirty="0">
                 <a:solidFill>
                   <a:srgbClr val="404040"/>
                 </a:solidFill>
@@ -6637,7 +6659,7 @@
               </a:rPr>
               <a:t>考え方</a:t>
             </a:r>
-            <a:endParaRPr lang="ja-JP" sz="1100" dirty="0"/>
+            <a:endParaRPr lang="ja-JP" sz="1050" dirty="0"/>
           </a:p>
         </p:txBody>
       </p:sp>
@@ -6654,7 +6676,7 @@
           </a:xfrm>
           <a:prstGeom prst="roundRect">
             <a:avLst>
-              <a:gd name="adj" fmla="val 15625"/>
+              <a:gd name="adj" fmla="val 7813"/>
             </a:avLst>
           </a:prstGeom>
           <a:solidFill>
@@ -6663,14 +6685,14 @@
           <a:ln/>
         </p:spPr>
         <p:txBody>
-          <a:bodyPr wrap="square" lIns="0" tIns="0" rIns="0" bIns="0" rtlCol="0" anchor="ctr"/>
+          <a:bodyPr wrap="none" lIns="0" tIns="0" rIns="0" bIns="0" rtlCol="0" anchor="ctr"/>
           <a:lstStyle/>
           <a:p>
             <a:pPr algn="ctr" indent="0" marL="0">
               <a:buNone/>
             </a:pPr>
             <a:r>
-              <a:rPr lang="ja-JP" altLang="en-US" sz="1100" dirty="0">
+              <a:rPr lang="ja-JP" altLang="en-US" sz="1050" dirty="0">
                 <a:solidFill>
                   <a:srgbClr val="404040"/>
                 </a:solidFill>
@@ -6680,14 +6702,14 @@
               </a:rPr>
               <a:t>ナロ</a:t>
             </a:r>
-            <a:endParaRPr lang="ja-JP" sz="1100" dirty="0"/>
+            <a:endParaRPr lang="ja-JP" sz="1050" dirty="0"/>
           </a:p>
           <a:p>
             <a:pPr algn="ctr" indent="0" marL="0">
               <a:buNone/>
             </a:pPr>
             <a:r>
-              <a:rPr lang="ja-JP" altLang="en-US" sz="1100" dirty="0">
+              <a:rPr lang="ja-JP" altLang="en-US" sz="1050" dirty="0">
                 <a:solidFill>
                   <a:srgbClr val="404040"/>
                 </a:solidFill>
@@ -6697,7 +6719,7 @@
               </a:rPr>
               <a:t>キソン</a:t>
             </a:r>
-            <a:endParaRPr lang="ja-JP" sz="1100" dirty="0"/>
+            <a:endParaRPr lang="ja-JP" sz="1050" dirty="0"/>
           </a:p>
         </p:txBody>
       </p:sp>
@@ -6714,7 +6736,7 @@
           </a:xfrm>
           <a:prstGeom prst="roundRect">
             <a:avLst>
-              <a:gd name="adj" fmla="val 15625"/>
+              <a:gd name="adj" fmla="val 7813"/>
             </a:avLst>
           </a:prstGeom>
           <a:solidFill>
@@ -6723,14 +6745,14 @@
           <a:ln/>
         </p:spPr>
         <p:txBody>
-          <a:bodyPr wrap="square" lIns="0" tIns="0" rIns="0" bIns="0" rtlCol="0" anchor="ctr"/>
+          <a:bodyPr wrap="none" lIns="0" tIns="0" rIns="0" bIns="0" rtlCol="0" anchor="ctr"/>
           <a:lstStyle/>
           <a:p>
             <a:pPr algn="ctr" indent="0" marL="0">
               <a:buNone/>
             </a:pPr>
             <a:r>
-              <a:rPr lang="ja-JP" altLang="en-US" sz="1100" b="1" dirty="0">
+              <a:rPr lang="ja-JP" altLang="en-US" sz="1050" b="1" dirty="0">
                 <a:solidFill>
                   <a:srgbClr val="FFFFFF"/>
                 </a:solidFill>
@@ -6740,14 +6762,14 @@
               </a:rPr>
               <a:t>フルマ</a:t>
             </a:r>
-            <a:endParaRPr lang="ja-JP" sz="1100" dirty="0"/>
+            <a:endParaRPr lang="ja-JP" sz="1050" dirty="0"/>
           </a:p>
           <a:p>
             <a:pPr algn="ctr" indent="0" marL="0">
               <a:buNone/>
             </a:pPr>
             <a:r>
-              <a:rPr lang="ja-JP" altLang="en-US" sz="1100" b="1" dirty="0">
+              <a:rPr lang="ja-JP" altLang="en-US" sz="1050" b="1" dirty="0">
                 <a:solidFill>
                   <a:srgbClr val="FFFFFF"/>
                 </a:solidFill>
@@ -6757,7 +6779,7 @@
               </a:rPr>
               <a:t>ゼニル</a:t>
             </a:r>
-            <a:endParaRPr lang="ja-JP" sz="1100" dirty="0"/>
+            <a:endParaRPr lang="ja-JP" sz="1050" dirty="0"/>
           </a:p>
         </p:txBody>
       </p:sp>
@@ -6774,7 +6796,7 @@
           </a:xfrm>
           <a:prstGeom prst="roundRect">
             <a:avLst>
-              <a:gd name="adj" fmla="val 15625"/>
+              <a:gd name="adj" fmla="val 7813"/>
             </a:avLst>
           </a:prstGeom>
           <a:solidFill>
@@ -6783,14 +6805,14 @@
           <a:ln/>
         </p:spPr>
         <p:txBody>
-          <a:bodyPr wrap="square" lIns="0" tIns="0" rIns="0" bIns="0" rtlCol="0" anchor="ctr"/>
+          <a:bodyPr wrap="none" lIns="0" tIns="0" rIns="0" bIns="0" rtlCol="0" anchor="ctr"/>
           <a:lstStyle/>
           <a:p>
             <a:pPr algn="ctr" indent="0" marL="0">
               <a:buNone/>
             </a:pPr>
             <a:r>
-              <a:rPr lang="ja-JP" altLang="en-US" sz="1100" dirty="0">
+              <a:rPr lang="ja-JP" altLang="en-US" sz="1050" dirty="0">
                 <a:solidFill>
                   <a:srgbClr val="404040"/>
                 </a:solidFill>
@@ -6800,7 +6822,7 @@
               </a:rPr>
               <a:t>落とし穴</a:t>
             </a:r>
-            <a:endParaRPr lang="ja-JP" sz="1100" dirty="0"/>
+            <a:endParaRPr lang="ja-JP" sz="1050" dirty="0"/>
           </a:p>
         </p:txBody>
       </p:sp>
@@ -6817,7 +6839,7 @@
           </a:xfrm>
           <a:prstGeom prst="roundRect">
             <a:avLst>
-              <a:gd name="adj" fmla="val 15625"/>
+              <a:gd name="adj" fmla="val 7813"/>
             </a:avLst>
           </a:prstGeom>
           <a:solidFill>
@@ -6826,14 +6848,14 @@
           <a:ln/>
         </p:spPr>
         <p:txBody>
-          <a:bodyPr wrap="square" lIns="0" tIns="0" rIns="0" bIns="0" rtlCol="0" anchor="ctr"/>
+          <a:bodyPr wrap="none" lIns="0" tIns="0" rIns="0" bIns="0" rtlCol="0" anchor="ctr"/>
           <a:lstStyle/>
           <a:p>
             <a:pPr algn="ctr" indent="0" marL="0">
               <a:buNone/>
             </a:pPr>
             <a:r>
-              <a:rPr lang="ja-JP" altLang="en-US" sz="1100" dirty="0">
+              <a:rPr lang="ja-JP" altLang="en-US" sz="1050" dirty="0">
                 <a:solidFill>
                   <a:srgbClr val="404040"/>
                 </a:solidFill>
@@ -6843,7 +6865,7 @@
               </a:rPr>
               <a:t>手順</a:t>
             </a:r>
-            <a:endParaRPr lang="ja-JP" sz="1100" dirty="0"/>
+            <a:endParaRPr lang="ja-JP" sz="1050" dirty="0"/>
           </a:p>
         </p:txBody>
       </p:sp>
@@ -7265,7 +7287,7 @@
           </a:xfrm>
           <a:prstGeom prst="roundRect">
             <a:avLst>
-              <a:gd name="adj" fmla="val 15625"/>
+              <a:gd name="adj" fmla="val 7813"/>
             </a:avLst>
           </a:prstGeom>
           <a:solidFill>
@@ -7274,14 +7296,14 @@
           <a:ln/>
         </p:spPr>
         <p:txBody>
-          <a:bodyPr wrap="square" lIns="0" tIns="0" rIns="0" bIns="0" rtlCol="0" anchor="ctr"/>
+          <a:bodyPr wrap="none" lIns="0" tIns="0" rIns="0" bIns="0" rtlCol="0" anchor="ctr"/>
           <a:lstStyle/>
           <a:p>
             <a:pPr algn="ctr" indent="0" marL="0">
               <a:buNone/>
             </a:pPr>
             <a:r>
-              <a:rPr lang="ja-JP" altLang="en-US" sz="1100" dirty="0">
+              <a:rPr lang="ja-JP" altLang="en-US" sz="1050" dirty="0">
                 <a:solidFill>
                   <a:srgbClr val="404040"/>
                 </a:solidFill>
@@ -7291,7 +7313,7 @@
               </a:rPr>
               <a:t>考え方</a:t>
             </a:r>
-            <a:endParaRPr lang="ja-JP" sz="1100" dirty="0"/>
+            <a:endParaRPr lang="ja-JP" sz="1050" dirty="0"/>
           </a:p>
         </p:txBody>
       </p:sp>
@@ -7308,7 +7330,7 @@
           </a:xfrm>
           <a:prstGeom prst="roundRect">
             <a:avLst>
-              <a:gd name="adj" fmla="val 15625"/>
+              <a:gd name="adj" fmla="val 7813"/>
             </a:avLst>
           </a:prstGeom>
           <a:solidFill>
@@ -7317,14 +7339,14 @@
           <a:ln/>
         </p:spPr>
         <p:txBody>
-          <a:bodyPr wrap="square" lIns="0" tIns="0" rIns="0" bIns="0" rtlCol="0" anchor="ctr"/>
+          <a:bodyPr wrap="none" lIns="0" tIns="0" rIns="0" bIns="0" rtlCol="0" anchor="ctr"/>
           <a:lstStyle/>
           <a:p>
             <a:pPr algn="ctr" indent="0" marL="0">
               <a:buNone/>
             </a:pPr>
             <a:r>
-              <a:rPr lang="ja-JP" altLang="en-US" sz="1100" dirty="0">
+              <a:rPr lang="ja-JP" altLang="en-US" sz="1050" dirty="0">
                 <a:solidFill>
                   <a:srgbClr val="404040"/>
                 </a:solidFill>
@@ -7334,14 +7356,14 @@
               </a:rPr>
               <a:t>ナロ</a:t>
             </a:r>
-            <a:endParaRPr lang="ja-JP" sz="1100" dirty="0"/>
+            <a:endParaRPr lang="ja-JP" sz="1050" dirty="0"/>
           </a:p>
           <a:p>
             <a:pPr algn="ctr" indent="0" marL="0">
               <a:buNone/>
             </a:pPr>
             <a:r>
-              <a:rPr lang="ja-JP" altLang="en-US" sz="1100" dirty="0">
+              <a:rPr lang="ja-JP" altLang="en-US" sz="1050" dirty="0">
                 <a:solidFill>
                   <a:srgbClr val="404040"/>
                 </a:solidFill>
@@ -7351,7 +7373,7 @@
               </a:rPr>
               <a:t>キソン</a:t>
             </a:r>
-            <a:endParaRPr lang="ja-JP" sz="1100" dirty="0"/>
+            <a:endParaRPr lang="ja-JP" sz="1050" dirty="0"/>
           </a:p>
         </p:txBody>
       </p:sp>
@@ -7368,7 +7390,7 @@
           </a:xfrm>
           <a:prstGeom prst="roundRect">
             <a:avLst>
-              <a:gd name="adj" fmla="val 15625"/>
+              <a:gd name="adj" fmla="val 7813"/>
             </a:avLst>
           </a:prstGeom>
           <a:solidFill>
@@ -7377,14 +7399,14 @@
           <a:ln/>
         </p:spPr>
         <p:txBody>
-          <a:bodyPr wrap="square" lIns="0" tIns="0" rIns="0" bIns="0" rtlCol="0" anchor="ctr"/>
+          <a:bodyPr wrap="none" lIns="0" tIns="0" rIns="0" bIns="0" rtlCol="0" anchor="ctr"/>
           <a:lstStyle/>
           <a:p>
             <a:pPr algn="ctr" indent="0" marL="0">
               <a:buNone/>
             </a:pPr>
             <a:r>
-              <a:rPr lang="ja-JP" altLang="en-US" sz="1100" dirty="0">
+              <a:rPr lang="ja-JP" altLang="en-US" sz="1050" dirty="0">
                 <a:solidFill>
                   <a:srgbClr val="404040"/>
                 </a:solidFill>
@@ -7394,14 +7416,14 @@
               </a:rPr>
               <a:t>フルマ</a:t>
             </a:r>
-            <a:endParaRPr lang="ja-JP" sz="1100" dirty="0"/>
+            <a:endParaRPr lang="ja-JP" sz="1050" dirty="0"/>
           </a:p>
           <a:p>
             <a:pPr algn="ctr" indent="0" marL="0">
               <a:buNone/>
             </a:pPr>
             <a:r>
-              <a:rPr lang="ja-JP" altLang="en-US" sz="1100" dirty="0">
+              <a:rPr lang="ja-JP" altLang="en-US" sz="1050" dirty="0">
                 <a:solidFill>
                   <a:srgbClr val="404040"/>
                 </a:solidFill>
@@ -7411,7 +7433,7 @@
               </a:rPr>
               <a:t>ゼニル</a:t>
             </a:r>
-            <a:endParaRPr lang="ja-JP" sz="1100" dirty="0"/>
+            <a:endParaRPr lang="ja-JP" sz="1050" dirty="0"/>
           </a:p>
         </p:txBody>
       </p:sp>
@@ -7428,7 +7450,7 @@
           </a:xfrm>
           <a:prstGeom prst="roundRect">
             <a:avLst>
-              <a:gd name="adj" fmla="val 15625"/>
+              <a:gd name="adj" fmla="val 7813"/>
             </a:avLst>
           </a:prstGeom>
           <a:solidFill>
@@ -7437,14 +7459,14 @@
           <a:ln/>
         </p:spPr>
         <p:txBody>
-          <a:bodyPr wrap="square" lIns="0" tIns="0" rIns="0" bIns="0" rtlCol="0" anchor="ctr"/>
+          <a:bodyPr wrap="none" lIns="0" tIns="0" rIns="0" bIns="0" rtlCol="0" anchor="ctr"/>
           <a:lstStyle/>
           <a:p>
             <a:pPr algn="ctr" indent="0" marL="0">
               <a:buNone/>
             </a:pPr>
             <a:r>
-              <a:rPr lang="ja-JP" altLang="en-US" sz="1100" b="1" dirty="0">
+              <a:rPr lang="ja-JP" altLang="en-US" sz="1050" b="1" dirty="0">
                 <a:solidFill>
                   <a:srgbClr val="FFFFFF"/>
                 </a:solidFill>
@@ -7454,7 +7476,7 @@
               </a:rPr>
               <a:t>落とし穴</a:t>
             </a:r>
-            <a:endParaRPr lang="ja-JP" sz="1100" dirty="0"/>
+            <a:endParaRPr lang="ja-JP" sz="1050" dirty="0"/>
           </a:p>
         </p:txBody>
       </p:sp>
@@ -7471,7 +7493,7 @@
           </a:xfrm>
           <a:prstGeom prst="roundRect">
             <a:avLst>
-              <a:gd name="adj" fmla="val 15625"/>
+              <a:gd name="adj" fmla="val 7813"/>
             </a:avLst>
           </a:prstGeom>
           <a:solidFill>
@@ -7480,14 +7502,14 @@
           <a:ln/>
         </p:spPr>
         <p:txBody>
-          <a:bodyPr wrap="square" lIns="0" tIns="0" rIns="0" bIns="0" rtlCol="0" anchor="ctr"/>
+          <a:bodyPr wrap="none" lIns="0" tIns="0" rIns="0" bIns="0" rtlCol="0" anchor="ctr"/>
           <a:lstStyle/>
           <a:p>
             <a:pPr algn="ctr" indent="0" marL="0">
               <a:buNone/>
             </a:pPr>
             <a:r>
-              <a:rPr lang="ja-JP" altLang="en-US" sz="1100" dirty="0">
+              <a:rPr lang="ja-JP" altLang="en-US" sz="1050" dirty="0">
                 <a:solidFill>
                   <a:srgbClr val="404040"/>
                 </a:solidFill>
@@ -7497,7 +7519,7 @@
               </a:rPr>
               <a:t>手順</a:t>
             </a:r>
-            <a:endParaRPr lang="ja-JP" sz="1100" dirty="0"/>
+            <a:endParaRPr lang="ja-JP" sz="1050" dirty="0"/>
           </a:p>
         </p:txBody>
       </p:sp>
@@ -7865,7 +7887,7 @@
           </a:xfrm>
           <a:prstGeom prst="roundRect">
             <a:avLst>
-              <a:gd name="adj" fmla="val 15625"/>
+              <a:gd name="adj" fmla="val 7813"/>
             </a:avLst>
           </a:prstGeom>
           <a:solidFill>
@@ -7874,14 +7896,14 @@
           <a:ln/>
         </p:spPr>
         <p:txBody>
-          <a:bodyPr wrap="square" lIns="0" tIns="0" rIns="0" bIns="0" rtlCol="0" anchor="ctr"/>
+          <a:bodyPr wrap="none" lIns="0" tIns="0" rIns="0" bIns="0" rtlCol="0" anchor="ctr"/>
           <a:lstStyle/>
           <a:p>
             <a:pPr algn="ctr" indent="0" marL="0">
               <a:buNone/>
             </a:pPr>
             <a:r>
-              <a:rPr lang="ja-JP" altLang="en-US" sz="1100" dirty="0">
+              <a:rPr lang="ja-JP" altLang="en-US" sz="1050" dirty="0">
                 <a:solidFill>
                   <a:srgbClr val="404040"/>
                 </a:solidFill>
@@ -7891,7 +7913,7 @@
               </a:rPr>
               <a:t>考え方</a:t>
             </a:r>
-            <a:endParaRPr lang="ja-JP" sz="1100" dirty="0"/>
+            <a:endParaRPr lang="ja-JP" sz="1050" dirty="0"/>
           </a:p>
         </p:txBody>
       </p:sp>
@@ -7908,7 +7930,7 @@
           </a:xfrm>
           <a:prstGeom prst="roundRect">
             <a:avLst>
-              <a:gd name="adj" fmla="val 15625"/>
+              <a:gd name="adj" fmla="val 7813"/>
             </a:avLst>
           </a:prstGeom>
           <a:solidFill>
@@ -7917,14 +7939,14 @@
           <a:ln/>
         </p:spPr>
         <p:txBody>
-          <a:bodyPr wrap="square" lIns="0" tIns="0" rIns="0" bIns="0" rtlCol="0" anchor="ctr"/>
+          <a:bodyPr wrap="none" lIns="0" tIns="0" rIns="0" bIns="0" rtlCol="0" anchor="ctr"/>
           <a:lstStyle/>
           <a:p>
             <a:pPr algn="ctr" indent="0" marL="0">
               <a:buNone/>
             </a:pPr>
             <a:r>
-              <a:rPr lang="ja-JP" altLang="en-US" sz="1100" dirty="0">
+              <a:rPr lang="ja-JP" altLang="en-US" sz="1050" dirty="0">
                 <a:solidFill>
                   <a:srgbClr val="404040"/>
                 </a:solidFill>
@@ -7934,14 +7956,14 @@
               </a:rPr>
               <a:t>ナロ</a:t>
             </a:r>
-            <a:endParaRPr lang="ja-JP" sz="1100" dirty="0"/>
+            <a:endParaRPr lang="ja-JP" sz="1050" dirty="0"/>
           </a:p>
           <a:p>
             <a:pPr algn="ctr" indent="0" marL="0">
               <a:buNone/>
             </a:pPr>
             <a:r>
-              <a:rPr lang="ja-JP" altLang="en-US" sz="1100" dirty="0">
+              <a:rPr lang="ja-JP" altLang="en-US" sz="1050" dirty="0">
                 <a:solidFill>
                   <a:srgbClr val="404040"/>
                 </a:solidFill>
@@ -7951,7 +7973,7 @@
               </a:rPr>
               <a:t>キソン</a:t>
             </a:r>
-            <a:endParaRPr lang="ja-JP" sz="1100" dirty="0"/>
+            <a:endParaRPr lang="ja-JP" sz="1050" dirty="0"/>
           </a:p>
         </p:txBody>
       </p:sp>
@@ -7968,7 +7990,7 @@
           </a:xfrm>
           <a:prstGeom prst="roundRect">
             <a:avLst>
-              <a:gd name="adj" fmla="val 15625"/>
+              <a:gd name="adj" fmla="val 7813"/>
             </a:avLst>
           </a:prstGeom>
           <a:solidFill>
@@ -7977,14 +7999,14 @@
           <a:ln/>
         </p:spPr>
         <p:txBody>
-          <a:bodyPr wrap="square" lIns="0" tIns="0" rIns="0" bIns="0" rtlCol="0" anchor="ctr"/>
+          <a:bodyPr wrap="none" lIns="0" tIns="0" rIns="0" bIns="0" rtlCol="0" anchor="ctr"/>
           <a:lstStyle/>
           <a:p>
             <a:pPr algn="ctr" indent="0" marL="0">
               <a:buNone/>
             </a:pPr>
             <a:r>
-              <a:rPr lang="ja-JP" altLang="en-US" sz="1100" dirty="0">
+              <a:rPr lang="ja-JP" altLang="en-US" sz="1050" dirty="0">
                 <a:solidFill>
                   <a:srgbClr val="404040"/>
                 </a:solidFill>
@@ -7994,14 +8016,14 @@
               </a:rPr>
               <a:t>フルマ</a:t>
             </a:r>
-            <a:endParaRPr lang="ja-JP" sz="1100" dirty="0"/>
+            <a:endParaRPr lang="ja-JP" sz="1050" dirty="0"/>
           </a:p>
           <a:p>
             <a:pPr algn="ctr" indent="0" marL="0">
               <a:buNone/>
             </a:pPr>
             <a:r>
-              <a:rPr lang="ja-JP" altLang="en-US" sz="1100" dirty="0">
+              <a:rPr lang="ja-JP" altLang="en-US" sz="1050" dirty="0">
                 <a:solidFill>
                   <a:srgbClr val="404040"/>
                 </a:solidFill>
@@ -8011,7 +8033,7 @@
               </a:rPr>
               <a:t>ゼニル</a:t>
             </a:r>
-            <a:endParaRPr lang="ja-JP" sz="1100" dirty="0"/>
+            <a:endParaRPr lang="ja-JP" sz="1050" dirty="0"/>
           </a:p>
         </p:txBody>
       </p:sp>
@@ -8028,7 +8050,7 @@
           </a:xfrm>
           <a:prstGeom prst="roundRect">
             <a:avLst>
-              <a:gd name="adj" fmla="val 15625"/>
+              <a:gd name="adj" fmla="val 7813"/>
             </a:avLst>
           </a:prstGeom>
           <a:solidFill>
@@ -8037,14 +8059,14 @@
           <a:ln/>
         </p:spPr>
         <p:txBody>
-          <a:bodyPr wrap="square" lIns="0" tIns="0" rIns="0" bIns="0" rtlCol="0" anchor="ctr"/>
+          <a:bodyPr wrap="none" lIns="0" tIns="0" rIns="0" bIns="0" rtlCol="0" anchor="ctr"/>
           <a:lstStyle/>
           <a:p>
             <a:pPr algn="ctr" indent="0" marL="0">
               <a:buNone/>
             </a:pPr>
             <a:r>
-              <a:rPr lang="ja-JP" altLang="en-US" sz="1100" dirty="0">
+              <a:rPr lang="ja-JP" altLang="en-US" sz="1050" dirty="0">
                 <a:solidFill>
                   <a:srgbClr val="404040"/>
                 </a:solidFill>
@@ -8054,7 +8076,7 @@
               </a:rPr>
               <a:t>落とし穴</a:t>
             </a:r>
-            <a:endParaRPr lang="ja-JP" sz="1100" dirty="0"/>
+            <a:endParaRPr lang="ja-JP" sz="1050" dirty="0"/>
           </a:p>
         </p:txBody>
       </p:sp>
@@ -8071,7 +8093,7 @@
           </a:xfrm>
           <a:prstGeom prst="roundRect">
             <a:avLst>
-              <a:gd name="adj" fmla="val 15625"/>
+              <a:gd name="adj" fmla="val 7813"/>
             </a:avLst>
           </a:prstGeom>
           <a:solidFill>
@@ -8080,14 +8102,14 @@
           <a:ln/>
         </p:spPr>
         <p:txBody>
-          <a:bodyPr wrap="square" lIns="0" tIns="0" rIns="0" bIns="0" rtlCol="0" anchor="ctr"/>
+          <a:bodyPr wrap="none" lIns="0" tIns="0" rIns="0" bIns="0" rtlCol="0" anchor="ctr"/>
           <a:lstStyle/>
           <a:p>
             <a:pPr algn="ctr" indent="0" marL="0">
               <a:buNone/>
             </a:pPr>
             <a:r>
-              <a:rPr lang="ja-JP" altLang="en-US" sz="1100" b="1" dirty="0">
+              <a:rPr lang="ja-JP" altLang="en-US" sz="1050" b="1" dirty="0">
                 <a:solidFill>
                   <a:srgbClr val="FFFFFF"/>
                 </a:solidFill>
@@ -8097,7 +8119,7 @@
               </a:rPr>
               <a:t>手順</a:t>
             </a:r>
-            <a:endParaRPr lang="ja-JP" sz="1100" dirty="0"/>
+            <a:endParaRPr lang="ja-JP" sz="1050" dirty="0"/>
           </a:p>
         </p:txBody>
       </p:sp>
@@ -8204,8 +8226,8 @@
         </p:nvSpPr>
         <p:spPr>
           <a:xfrm>
-            <a:off x="502920" y="1700784"/>
-            <a:ext cx="6172200" cy="512064"/>
+            <a:off x="1796796" y="1691640"/>
+            <a:ext cx="8595360" cy="512064"/>
           </a:xfrm>
           <a:prstGeom prst="roundRect">
             <a:avLst>
@@ -8222,14 +8244,14 @@
           </a:ln>
         </p:spPr>
         <p:txBody>
-          <a:bodyPr wrap="square" lIns="164592" tIns="164592" rIns="164592" bIns="164592" rtlCol="0" anchor="ctr"/>
-          <a:lstStyle/>
-          <a:p>
-            <a:pPr algn="l" indent="0" marL="0">
-              <a:buNone/>
-            </a:pPr>
-            <a:r>
-              <a:rPr lang="ja-JP" altLang="en-US" sz="2400" b="1" dirty="0">
+          <a:bodyPr wrap="square" lIns="182880" tIns="182880" rIns="182880" bIns="182880" rtlCol="0" anchor="ctr"/>
+          <a:lstStyle/>
+          <a:p>
+            <a:pPr algn="ctr" indent="0" marL="0">
+              <a:buNone/>
+            </a:pPr>
+            <a:r>
+              <a:rPr lang="ja-JP" altLang="en-US" sz="2600" b="1" dirty="0">
                 <a:solidFill>
                   <a:srgbClr val="262626"/>
                 </a:solidFill>
@@ -8239,7 +8261,7 @@
               </a:rPr>
               <a:t>気道を開け、酸素、必要なら換気</a:t>
             </a:r>
-            <a:endParaRPr lang="ja-JP" sz="2400" dirty="0"/>
+            <a:endParaRPr lang="ja-JP" sz="2600" dirty="0"/>
           </a:p>
         </p:txBody>
       </p:sp>
@@ -8251,14 +8273,14 @@
         </p:nvSpPr>
         <p:spPr>
           <a:xfrm>
-            <a:off x="1051560" y="2258568"/>
-            <a:ext cx="0" cy="256032"/>
+            <a:off x="6094476" y="2258568"/>
+            <a:ext cx="0" cy="258318"/>
           </a:xfrm>
           <a:prstGeom prst="line">
             <a:avLst/>
           </a:prstGeom>
           <a:noFill/>
-          <a:ln w="38100">
+          <a:ln w="57150">
             <a:solidFill>
               <a:srgbClr val="404040"/>
             </a:solidFill>
@@ -8275,8 +8297,8 @@
         </p:nvSpPr>
         <p:spPr>
           <a:xfrm>
-            <a:off x="502920" y="2560320"/>
-            <a:ext cx="6172200" cy="512064"/>
+            <a:off x="1796796" y="2571750"/>
+            <a:ext cx="8595360" cy="512064"/>
           </a:xfrm>
           <a:prstGeom prst="roundRect">
             <a:avLst>
@@ -8293,14 +8315,14 @@
           </a:ln>
         </p:spPr>
         <p:txBody>
-          <a:bodyPr wrap="square" lIns="164592" tIns="164592" rIns="164592" bIns="164592" rtlCol="0" anchor="ctr"/>
-          <a:lstStyle/>
-          <a:p>
-            <a:pPr algn="l" indent="0" marL="0">
-              <a:buNone/>
-            </a:pPr>
-            <a:r>
-              <a:rPr lang="ja-JP" altLang="en-US" sz="2400" b="1" dirty="0">
+          <a:bodyPr wrap="square" lIns="182880" tIns="182880" rIns="182880" bIns="182880" rtlCol="0" anchor="ctr"/>
+          <a:lstStyle/>
+          <a:p>
+            <a:pPr algn="ctr" indent="0" marL="0">
+              <a:buNone/>
+            </a:pPr>
+            <a:r>
+              <a:rPr lang="ja-JP" altLang="en-US" sz="2600" b="1" dirty="0">
                 <a:solidFill>
                   <a:srgbClr val="262626"/>
                 </a:solidFill>
@@ -8310,36 +8332,8 @@
               </a:rPr>
               <a:t>原因を並べる</a:t>
             </a:r>
-            <a:endParaRPr lang="ja-JP" sz="2400" dirty="0"/>
-          </a:p>
-        </p:txBody>
-      </p:sp>
-      <p:sp>
-        <p:nvSpPr>
-          <p:cNvPr id="14" name="Text 12"/>
-          <p:cNvSpPr txBox="1"/>
-          <p:nvPr/>
-        </p:nvSpPr>
-        <p:spPr>
-          <a:xfrm>
-            <a:off x="7004304" y="2606040"/>
-            <a:ext cx="4681728" cy="420624"/>
-          </a:xfrm>
-          <a:prstGeom prst="rect">
-            <a:avLst/>
-          </a:prstGeom>
-          <a:noFill/>
-          <a:ln/>
-        </p:spPr>
-        <p:txBody>
-          <a:bodyPr wrap="square" lIns="0" tIns="0" rIns="0" bIns="0" rtlCol="0" anchor="t"/>
-          <a:lstStyle/>
-          <a:p>
-            <a:pPr algn="l" indent="0" marL="0">
-              <a:buNone/>
-            </a:pPr>
-            <a:r>
-              <a:rPr lang="ja-JP" altLang="en-US" sz="2200" b="1" dirty="0">
+            <a:r>
+              <a:rPr lang="ja-JP" altLang="en-US" sz="2600" b="1" dirty="0">
                 <a:solidFill>
                   <a:srgbClr val="0072B2"/>
                 </a:solidFill>
@@ -8349,26 +8343,26 @@
               </a:rPr>
               <a:t>（薬・筋弛緩・CO2・体温・糖）</a:t>
             </a:r>
-            <a:endParaRPr lang="ja-JP" sz="2200" dirty="0"/>
-          </a:p>
-        </p:txBody>
-      </p:sp>
-      <p:sp>
-        <p:nvSpPr>
-          <p:cNvPr id="15" name="Shape 13"/>
+            <a:endParaRPr lang="ja-JP" sz="2600" dirty="0"/>
+          </a:p>
+        </p:txBody>
+      </p:sp>
+      <p:sp>
+        <p:nvSpPr>
+          <p:cNvPr id="14" name="Shape 12"/>
           <p:cNvSpPr/>
           <p:nvPr/>
         </p:nvSpPr>
         <p:spPr>
           <a:xfrm>
-            <a:off x="1051560" y="3118104"/>
-            <a:ext cx="0" cy="256032"/>
+            <a:off x="6094476" y="3138678"/>
+            <a:ext cx="0" cy="258318"/>
           </a:xfrm>
           <a:prstGeom prst="line">
             <a:avLst/>
           </a:prstGeom>
           <a:noFill/>
-          <a:ln w="38100">
+          <a:ln w="57150">
             <a:solidFill>
               <a:srgbClr val="404040"/>
             </a:solidFill>
@@ -8379,14 +8373,14 @@
       </p:sp>
       <p:sp>
         <p:nvSpPr>
-          <p:cNvPr id="16" name="Text 14"/>
+          <p:cNvPr id="15" name="Text 13"/>
           <p:cNvSpPr/>
           <p:nvPr/>
         </p:nvSpPr>
         <p:spPr>
           <a:xfrm>
-            <a:off x="502920" y="3419856"/>
-            <a:ext cx="6172200" cy="512064"/>
+            <a:off x="1796796" y="3451860"/>
+            <a:ext cx="8595360" cy="512064"/>
           </a:xfrm>
           <a:prstGeom prst="roundRect">
             <a:avLst>
@@ -8403,14 +8397,14 @@
           </a:ln>
         </p:spPr>
         <p:txBody>
-          <a:bodyPr wrap="square" lIns="164592" tIns="164592" rIns="164592" bIns="164592" rtlCol="0" anchor="ctr"/>
-          <a:lstStyle/>
-          <a:p>
-            <a:pPr algn="l" indent="0" marL="0">
-              <a:buNone/>
-            </a:pPr>
-            <a:r>
-              <a:rPr lang="ja-JP" altLang="en-US" sz="2400" b="1" dirty="0">
+          <a:bodyPr wrap="square" lIns="182880" tIns="182880" rIns="182880" bIns="182880" rtlCol="0" anchor="ctr"/>
+          <a:lstStyle/>
+          <a:p>
+            <a:pPr algn="ctr" indent="0" marL="0">
+              <a:buNone/>
+            </a:pPr>
+            <a:r>
+              <a:rPr lang="ja-JP" altLang="en-US" sz="2600" b="1" dirty="0">
                 <a:solidFill>
                   <a:srgbClr val="262626"/>
                 </a:solidFill>
@@ -8420,36 +8414,8 @@
               </a:rPr>
               <a:t>拮抗薬を少量ずつ</a:t>
             </a:r>
-            <a:endParaRPr lang="ja-JP" sz="2400" dirty="0"/>
-          </a:p>
-        </p:txBody>
-      </p:sp>
-      <p:sp>
-        <p:nvSpPr>
-          <p:cNvPr id="17" name="Text 15"/>
-          <p:cNvSpPr txBox="1"/>
-          <p:nvPr/>
-        </p:nvSpPr>
-        <p:spPr>
-          <a:xfrm>
-            <a:off x="7004304" y="3465576"/>
-            <a:ext cx="4681728" cy="420624"/>
-          </a:xfrm>
-          <a:prstGeom prst="rect">
-            <a:avLst/>
-          </a:prstGeom>
-          <a:noFill/>
-          <a:ln/>
-        </p:spPr>
-        <p:txBody>
-          <a:bodyPr wrap="square" lIns="0" tIns="0" rIns="0" bIns="0" rtlCol="0" anchor="t"/>
-          <a:lstStyle/>
-          <a:p>
-            <a:pPr algn="l" indent="0" marL="0">
-              <a:buNone/>
-            </a:pPr>
-            <a:r>
-              <a:rPr lang="ja-JP" altLang="en-US" sz="2200" b="1" dirty="0">
+            <a:r>
+              <a:rPr lang="ja-JP" altLang="en-US" sz="2600" b="1" dirty="0">
                 <a:solidFill>
                   <a:srgbClr val="0072B2"/>
                 </a:solidFill>
@@ -8459,26 +8425,26 @@
               </a:rPr>
               <a:t>（反応を見て追加）</a:t>
             </a:r>
-            <a:endParaRPr lang="ja-JP" sz="2200" dirty="0"/>
-          </a:p>
-        </p:txBody>
-      </p:sp>
-      <p:sp>
-        <p:nvSpPr>
-          <p:cNvPr id="18" name="Shape 16"/>
+            <a:endParaRPr lang="ja-JP" sz="2600" dirty="0"/>
+          </a:p>
+        </p:txBody>
+      </p:sp>
+      <p:sp>
+        <p:nvSpPr>
+          <p:cNvPr id="16" name="Shape 14"/>
           <p:cNvSpPr/>
           <p:nvPr/>
         </p:nvSpPr>
         <p:spPr>
           <a:xfrm>
-            <a:off x="1051560" y="3977640"/>
-            <a:ext cx="0" cy="256032"/>
+            <a:off x="6094476" y="4018788"/>
+            <a:ext cx="0" cy="258318"/>
           </a:xfrm>
           <a:prstGeom prst="line">
             <a:avLst/>
           </a:prstGeom>
           <a:noFill/>
-          <a:ln w="38100">
+          <a:ln w="57150">
             <a:solidFill>
               <a:srgbClr val="404040"/>
             </a:solidFill>
@@ -8489,14 +8455,14 @@
       </p:sp>
       <p:sp>
         <p:nvSpPr>
-          <p:cNvPr id="19" name="Text 17"/>
+          <p:cNvPr id="17" name="Text 15"/>
           <p:cNvSpPr/>
           <p:nvPr/>
         </p:nvSpPr>
         <p:spPr>
           <a:xfrm>
-            <a:off x="502920" y="4279392"/>
-            <a:ext cx="6172200" cy="512064"/>
+            <a:off x="1796796" y="4331970"/>
+            <a:ext cx="8595360" cy="512064"/>
           </a:xfrm>
           <a:prstGeom prst="roundRect">
             <a:avLst>
@@ -8513,14 +8479,14 @@
           </a:ln>
         </p:spPr>
         <p:txBody>
-          <a:bodyPr wrap="square" lIns="164592" tIns="164592" rIns="164592" bIns="164592" rtlCol="0" anchor="ctr"/>
-          <a:lstStyle/>
-          <a:p>
-            <a:pPr algn="l" indent="0" marL="0">
-              <a:buNone/>
-            </a:pPr>
-            <a:r>
-              <a:rPr lang="ja-JP" altLang="en-US" sz="2400" b="1" dirty="0">
+          <a:bodyPr wrap="square" lIns="182880" tIns="182880" rIns="182880" bIns="182880" rtlCol="0" anchor="ctr"/>
+          <a:lstStyle/>
+          <a:p>
+            <a:pPr algn="ctr" indent="0" marL="0">
+              <a:buNone/>
+            </a:pPr>
+            <a:r>
+              <a:rPr lang="ja-JP" altLang="en-US" sz="2600" b="1" dirty="0">
                 <a:solidFill>
                   <a:srgbClr val="262626"/>
                 </a:solidFill>
@@ -8530,26 +8496,26 @@
               </a:rPr>
               <a:t>呼吸数・反応を再評価</a:t>
             </a:r>
-            <a:endParaRPr lang="ja-JP" sz="2400" dirty="0"/>
-          </a:p>
-        </p:txBody>
-      </p:sp>
-      <p:sp>
-        <p:nvSpPr>
-          <p:cNvPr id="20" name="Shape 18"/>
+            <a:endParaRPr lang="ja-JP" sz="2600" dirty="0"/>
+          </a:p>
+        </p:txBody>
+      </p:sp>
+      <p:sp>
+        <p:nvSpPr>
+          <p:cNvPr id="18" name="Shape 16"/>
           <p:cNvSpPr/>
           <p:nvPr/>
         </p:nvSpPr>
         <p:spPr>
           <a:xfrm>
-            <a:off x="1051560" y="4837176"/>
-            <a:ext cx="0" cy="256032"/>
+            <a:off x="6094476" y="4898898"/>
+            <a:ext cx="0" cy="258318"/>
           </a:xfrm>
           <a:prstGeom prst="line">
             <a:avLst/>
           </a:prstGeom>
           <a:noFill/>
-          <a:ln w="38100">
+          <a:ln w="57150">
             <a:solidFill>
               <a:srgbClr val="404040"/>
             </a:solidFill>
@@ -8560,14 +8526,14 @@
       </p:sp>
       <p:sp>
         <p:nvSpPr>
-          <p:cNvPr id="21" name="Text 19"/>
+          <p:cNvPr id="19" name="Text 17"/>
           <p:cNvSpPr/>
           <p:nvPr/>
         </p:nvSpPr>
         <p:spPr>
           <a:xfrm>
-            <a:off x="502920" y="5138928"/>
-            <a:ext cx="6172200" cy="512064"/>
+            <a:off x="1796796" y="5212080"/>
+            <a:ext cx="8595360" cy="512064"/>
           </a:xfrm>
           <a:prstGeom prst="roundRect">
             <a:avLst>
@@ -8584,14 +8550,14 @@
           </a:ln>
         </p:spPr>
         <p:txBody>
-          <a:bodyPr wrap="square" lIns="164592" tIns="164592" rIns="164592" bIns="164592" rtlCol="0" anchor="ctr"/>
-          <a:lstStyle/>
-          <a:p>
-            <a:pPr algn="l" indent="0" marL="0">
-              <a:buNone/>
-            </a:pPr>
-            <a:r>
-              <a:rPr lang="ja-JP" altLang="en-US" sz="2400" b="1" dirty="0">
+          <a:bodyPr wrap="square" lIns="182880" tIns="182880" rIns="182880" bIns="182880" rtlCol="0" anchor="ctr"/>
+          <a:lstStyle/>
+          <a:p>
+            <a:pPr algn="ctr" indent="0" marL="0">
+              <a:buNone/>
+            </a:pPr>
+            <a:r>
+              <a:rPr lang="ja-JP" altLang="en-US" sz="2600" b="1" dirty="0">
                 <a:solidFill>
                   <a:srgbClr val="262626"/>
                 </a:solidFill>
@@ -8601,7 +8567,7 @@
               </a:rPr>
               <a:t>作動薬が切れるまで観察し、申し送る</a:t>
             </a:r>
-            <a:endParaRPr lang="ja-JP" sz="2400" dirty="0"/>
+            <a:endParaRPr lang="ja-JP" sz="2600" dirty="0"/>
           </a:p>
         </p:txBody>
       </p:sp>
@@ -8714,7 +8680,7 @@
           </a:xfrm>
           <a:prstGeom prst="roundRect">
             <a:avLst>
-              <a:gd name="adj" fmla="val 15625"/>
+              <a:gd name="adj" fmla="val 7813"/>
             </a:avLst>
           </a:prstGeom>
           <a:solidFill>
@@ -8723,14 +8689,14 @@
           <a:ln/>
         </p:spPr>
         <p:txBody>
-          <a:bodyPr wrap="square" lIns="0" tIns="0" rIns="0" bIns="0" rtlCol="0" anchor="ctr"/>
+          <a:bodyPr wrap="none" lIns="0" tIns="0" rIns="0" bIns="0" rtlCol="0" anchor="ctr"/>
           <a:lstStyle/>
           <a:p>
             <a:pPr algn="ctr" indent="0" marL="0">
               <a:buNone/>
             </a:pPr>
             <a:r>
-              <a:rPr lang="ja-JP" altLang="en-US" sz="1100" dirty="0">
+              <a:rPr lang="ja-JP" altLang="en-US" sz="1050" dirty="0">
                 <a:solidFill>
                   <a:srgbClr val="404040"/>
                 </a:solidFill>
@@ -8740,7 +8706,7 @@
               </a:rPr>
               <a:t>考え方</a:t>
             </a:r>
-            <a:endParaRPr lang="ja-JP" sz="1100" dirty="0"/>
+            <a:endParaRPr lang="ja-JP" sz="1050" dirty="0"/>
           </a:p>
         </p:txBody>
       </p:sp>
@@ -8757,7 +8723,7 @@
           </a:xfrm>
           <a:prstGeom prst="roundRect">
             <a:avLst>
-              <a:gd name="adj" fmla="val 15625"/>
+              <a:gd name="adj" fmla="val 7813"/>
             </a:avLst>
           </a:prstGeom>
           <a:solidFill>
@@ -8766,14 +8732,14 @@
           <a:ln/>
         </p:spPr>
         <p:txBody>
-          <a:bodyPr wrap="square" lIns="0" tIns="0" rIns="0" bIns="0" rtlCol="0" anchor="ctr"/>
+          <a:bodyPr wrap="none" lIns="0" tIns="0" rIns="0" bIns="0" rtlCol="0" anchor="ctr"/>
           <a:lstStyle/>
           <a:p>
             <a:pPr algn="ctr" indent="0" marL="0">
               <a:buNone/>
             </a:pPr>
             <a:r>
-              <a:rPr lang="ja-JP" altLang="en-US" sz="1100" dirty="0">
+              <a:rPr lang="ja-JP" altLang="en-US" sz="1050" dirty="0">
                 <a:solidFill>
                   <a:srgbClr val="404040"/>
                 </a:solidFill>
@@ -8783,14 +8749,14 @@
               </a:rPr>
               <a:t>ナロ</a:t>
             </a:r>
-            <a:endParaRPr lang="ja-JP" sz="1100" dirty="0"/>
+            <a:endParaRPr lang="ja-JP" sz="1050" dirty="0"/>
           </a:p>
           <a:p>
             <a:pPr algn="ctr" indent="0" marL="0">
               <a:buNone/>
             </a:pPr>
             <a:r>
-              <a:rPr lang="ja-JP" altLang="en-US" sz="1100" dirty="0">
+              <a:rPr lang="ja-JP" altLang="en-US" sz="1050" dirty="0">
                 <a:solidFill>
                   <a:srgbClr val="404040"/>
                 </a:solidFill>
@@ -8800,7 +8766,7 @@
               </a:rPr>
               <a:t>キソン</a:t>
             </a:r>
-            <a:endParaRPr lang="ja-JP" sz="1100" dirty="0"/>
+            <a:endParaRPr lang="ja-JP" sz="1050" dirty="0"/>
           </a:p>
         </p:txBody>
       </p:sp>
@@ -8817,7 +8783,7 @@
           </a:xfrm>
           <a:prstGeom prst="roundRect">
             <a:avLst>
-              <a:gd name="adj" fmla="val 15625"/>
+              <a:gd name="adj" fmla="val 7813"/>
             </a:avLst>
           </a:prstGeom>
           <a:solidFill>
@@ -8826,14 +8792,14 @@
           <a:ln/>
         </p:spPr>
         <p:txBody>
-          <a:bodyPr wrap="square" lIns="0" tIns="0" rIns="0" bIns="0" rtlCol="0" anchor="ctr"/>
+          <a:bodyPr wrap="none" lIns="0" tIns="0" rIns="0" bIns="0" rtlCol="0" anchor="ctr"/>
           <a:lstStyle/>
           <a:p>
             <a:pPr algn="ctr" indent="0" marL="0">
               <a:buNone/>
             </a:pPr>
             <a:r>
-              <a:rPr lang="ja-JP" altLang="en-US" sz="1100" dirty="0">
+              <a:rPr lang="ja-JP" altLang="en-US" sz="1050" dirty="0">
                 <a:solidFill>
                   <a:srgbClr val="404040"/>
                 </a:solidFill>
@@ -8843,14 +8809,14 @@
               </a:rPr>
               <a:t>フルマ</a:t>
             </a:r>
-            <a:endParaRPr lang="ja-JP" sz="1100" dirty="0"/>
+            <a:endParaRPr lang="ja-JP" sz="1050" dirty="0"/>
           </a:p>
           <a:p>
             <a:pPr algn="ctr" indent="0" marL="0">
               <a:buNone/>
             </a:pPr>
             <a:r>
-              <a:rPr lang="ja-JP" altLang="en-US" sz="1100" dirty="0">
+              <a:rPr lang="ja-JP" altLang="en-US" sz="1050" dirty="0">
                 <a:solidFill>
                   <a:srgbClr val="404040"/>
                 </a:solidFill>
@@ -8860,7 +8826,7 @@
               </a:rPr>
               <a:t>ゼニル</a:t>
             </a:r>
-            <a:endParaRPr lang="ja-JP" sz="1100" dirty="0"/>
+            <a:endParaRPr lang="ja-JP" sz="1050" dirty="0"/>
           </a:p>
         </p:txBody>
       </p:sp>
@@ -8877,7 +8843,7 @@
           </a:xfrm>
           <a:prstGeom prst="roundRect">
             <a:avLst>
-              <a:gd name="adj" fmla="val 15625"/>
+              <a:gd name="adj" fmla="val 7813"/>
             </a:avLst>
           </a:prstGeom>
           <a:solidFill>
@@ -8886,14 +8852,14 @@
           <a:ln/>
         </p:spPr>
         <p:txBody>
-          <a:bodyPr wrap="square" lIns="0" tIns="0" rIns="0" bIns="0" rtlCol="0" anchor="ctr"/>
+          <a:bodyPr wrap="none" lIns="0" tIns="0" rIns="0" bIns="0" rtlCol="0" anchor="ctr"/>
           <a:lstStyle/>
           <a:p>
             <a:pPr algn="ctr" indent="0" marL="0">
               <a:buNone/>
             </a:pPr>
             <a:r>
-              <a:rPr lang="ja-JP" altLang="en-US" sz="1100" dirty="0">
+              <a:rPr lang="ja-JP" altLang="en-US" sz="1050" dirty="0">
                 <a:solidFill>
                   <a:srgbClr val="404040"/>
                 </a:solidFill>
@@ -8903,7 +8869,7 @@
               </a:rPr>
               <a:t>落とし穴</a:t>
             </a:r>
-            <a:endParaRPr lang="ja-JP" sz="1100" dirty="0"/>
+            <a:endParaRPr lang="ja-JP" sz="1050" dirty="0"/>
           </a:p>
         </p:txBody>
       </p:sp>
@@ -8920,7 +8886,7 @@
           </a:xfrm>
           <a:prstGeom prst="roundRect">
             <a:avLst>
-              <a:gd name="adj" fmla="val 15625"/>
+              <a:gd name="adj" fmla="val 7813"/>
             </a:avLst>
           </a:prstGeom>
           <a:solidFill>
@@ -8929,14 +8895,14 @@
           <a:ln/>
         </p:spPr>
         <p:txBody>
-          <a:bodyPr wrap="square" lIns="0" tIns="0" rIns="0" bIns="0" rtlCol="0" anchor="ctr"/>
+          <a:bodyPr wrap="none" lIns="0" tIns="0" rIns="0" bIns="0" rtlCol="0" anchor="ctr"/>
           <a:lstStyle/>
           <a:p>
             <a:pPr algn="ctr" indent="0" marL="0">
               <a:buNone/>
             </a:pPr>
             <a:r>
-              <a:rPr lang="ja-JP" altLang="en-US" sz="1100" b="1" dirty="0">
+              <a:rPr lang="ja-JP" altLang="en-US" sz="1050" b="1" dirty="0">
                 <a:solidFill>
                   <a:srgbClr val="FFFFFF"/>
                 </a:solidFill>
@@ -8946,7 +8912,7 @@
               </a:rPr>
               <a:t>手順</a:t>
             </a:r>
-            <a:endParaRPr lang="ja-JP" sz="1100" dirty="0"/>
+            <a:endParaRPr lang="ja-JP" sz="1050" dirty="0"/>
           </a:p>
         </p:txBody>
       </p:sp>
